--- a/MH_semestralka_p__index/presentation/MH_semestralka_p__index_prezentace.pptx
+++ b/MH_semestralka_p__index/presentation/MH_semestralka_p__index_prezentace.pptx
@@ -5,23 +5,23 @@
     <p:sldMasterId id="2147483648" r:id="rId1"/>
   </p:sldMasterIdLst>
   <p:sldIdLst>
-    <p:sldId id="256" r:id="rId7"/>
-    <p:sldId id="257" r:id="rId8"/>
-    <p:sldId id="258" r:id="rId9"/>
-    <p:sldId id="259" r:id="rId10"/>
-    <p:sldId id="260" r:id="rId11"/>
-    <p:sldId id="261" r:id="rId12"/>
-    <p:sldId id="262" r:id="rId13"/>
-    <p:sldId id="263" r:id="rId14"/>
-    <p:sldId id="264" r:id="rId15"/>
-    <p:sldId id="265" r:id="rId16"/>
-    <p:sldId id="266" r:id="rId17"/>
-    <p:sldId id="267" r:id="rId18"/>
-    <p:sldId id="268" r:id="rId19"/>
-    <p:sldId id="269" r:id="rId20"/>
-    <p:sldId id="270" r:id="rId21"/>
+    <p:sldId id="256" r:id="rId2"/>
+    <p:sldId id="257" r:id="rId3"/>
+    <p:sldId id="258" r:id="rId4"/>
+    <p:sldId id="259" r:id="rId5"/>
+    <p:sldId id="260" r:id="rId6"/>
+    <p:sldId id="261" r:id="rId7"/>
+    <p:sldId id="262" r:id="rId8"/>
+    <p:sldId id="263" r:id="rId9"/>
+    <p:sldId id="264" r:id="rId10"/>
+    <p:sldId id="265" r:id="rId11"/>
+    <p:sldId id="266" r:id="rId12"/>
+    <p:sldId id="267" r:id="rId13"/>
+    <p:sldId id="268" r:id="rId14"/>
+    <p:sldId id="269" r:id="rId15"/>
+    <p:sldId id="270" r:id="rId16"/>
   </p:sldIdLst>
-  <p:sldSz cx="12191695" cy="6858000" type="screen4x3"/>
+  <p:sldSz cx="12192000" cy="6858000"/>
   <p:notesSz cx="6858000" cy="9144000"/>
   <p:defaultTextStyle>
     <a:defPPr>
@@ -118,6 +118,22 @@
       </a:defRPr>
     </a:lvl9pPr>
   </p:defaultTextStyle>
+  <p:extLst>
+    <p:ext uri="{EFAFB233-063F-42B5-8137-9DF3F51BA10A}">
+      <p15:sldGuideLst xmlns:p15="http://schemas.microsoft.com/office/powerpoint/2012/main">
+        <p15:guide id="1" orient="horz" pos="2160">
+          <p15:clr>
+            <a:srgbClr val="A4A3A4"/>
+          </p15:clr>
+        </p15:guide>
+        <p15:guide id="2" pos="2880">
+          <p15:clr>
+            <a:srgbClr val="A4A3A4"/>
+          </p15:clr>
+        </p15:guide>
+      </p15:sldGuideLst>
+    </p:ext>
+  </p:extLst>
 </p:presentation>
 </file>
 
@@ -302,7 +318,7 @@
           <a:p>
             <a:fld id="{5BCAD085-E8A6-8845-BD4E-CB4CCA059FC4}" type="datetimeFigureOut">
               <a:rPr lang="en-US" smtClean="0"/>
-              <a:t>1/27/13</a:t>
+              <a:t>5/10/2026</a:t>
             </a:fld>
             <a:endParaRPr lang="en-US"/>
           </a:p>
@@ -472,7 +488,7 @@
           <a:p>
             <a:fld id="{5BCAD085-E8A6-8845-BD4E-CB4CCA059FC4}" type="datetimeFigureOut">
               <a:rPr lang="en-US" smtClean="0"/>
-              <a:t>1/27/13</a:t>
+              <a:t>5/10/2026</a:t>
             </a:fld>
             <a:endParaRPr lang="en-US"/>
           </a:p>
@@ -652,7 +668,7 @@
           <a:p>
             <a:fld id="{5BCAD085-E8A6-8845-BD4E-CB4CCA059FC4}" type="datetimeFigureOut">
               <a:rPr lang="en-US" smtClean="0"/>
-              <a:t>1/27/13</a:t>
+              <a:t>5/10/2026</a:t>
             </a:fld>
             <a:endParaRPr lang="en-US"/>
           </a:p>
@@ -822,7 +838,7 @@
           <a:p>
             <a:fld id="{5BCAD085-E8A6-8845-BD4E-CB4CCA059FC4}" type="datetimeFigureOut">
               <a:rPr lang="en-US" smtClean="0"/>
-              <a:t>1/27/13</a:t>
+              <a:t>5/10/2026</a:t>
             </a:fld>
             <a:endParaRPr lang="en-US"/>
           </a:p>
@@ -1068,7 +1084,7 @@
           <a:p>
             <a:fld id="{5BCAD085-E8A6-8845-BD4E-CB4CCA059FC4}" type="datetimeFigureOut">
               <a:rPr lang="en-US" smtClean="0"/>
-              <a:t>1/27/13</a:t>
+              <a:t>5/10/2026</a:t>
             </a:fld>
             <a:endParaRPr lang="en-US"/>
           </a:p>
@@ -1356,7 +1372,7 @@
           <a:p>
             <a:fld id="{5BCAD085-E8A6-8845-BD4E-CB4CCA059FC4}" type="datetimeFigureOut">
               <a:rPr lang="en-US" smtClean="0"/>
-              <a:t>1/27/13</a:t>
+              <a:t>5/10/2026</a:t>
             </a:fld>
             <a:endParaRPr lang="en-US"/>
           </a:p>
@@ -1778,7 +1794,7 @@
           <a:p>
             <a:fld id="{5BCAD085-E8A6-8845-BD4E-CB4CCA059FC4}" type="datetimeFigureOut">
               <a:rPr lang="en-US" smtClean="0"/>
-              <a:t>1/27/13</a:t>
+              <a:t>5/10/2026</a:t>
             </a:fld>
             <a:endParaRPr lang="en-US"/>
           </a:p>
@@ -1896,7 +1912,7 @@
           <a:p>
             <a:fld id="{5BCAD085-E8A6-8845-BD4E-CB4CCA059FC4}" type="datetimeFigureOut">
               <a:rPr lang="en-US" smtClean="0"/>
-              <a:t>1/27/13</a:t>
+              <a:t>5/10/2026</a:t>
             </a:fld>
             <a:endParaRPr lang="en-US"/>
           </a:p>
@@ -1991,7 +2007,7 @@
           <a:p>
             <a:fld id="{5BCAD085-E8A6-8845-BD4E-CB4CCA059FC4}" type="datetimeFigureOut">
               <a:rPr lang="en-US" smtClean="0"/>
-              <a:t>1/27/13</a:t>
+              <a:t>5/10/2026</a:t>
             </a:fld>
             <a:endParaRPr lang="en-US"/>
           </a:p>
@@ -2268,7 +2284,7 @@
           <a:p>
             <a:fld id="{5BCAD085-E8A6-8845-BD4E-CB4CCA059FC4}" type="datetimeFigureOut">
               <a:rPr lang="en-US" smtClean="0"/>
-              <a:t>1/27/13</a:t>
+              <a:t>5/10/2026</a:t>
             </a:fld>
             <a:endParaRPr lang="en-US"/>
           </a:p>
@@ -2521,7 +2537,7 @@
           <a:p>
             <a:fld id="{5BCAD085-E8A6-8845-BD4E-CB4CCA059FC4}" type="datetimeFigureOut">
               <a:rPr lang="en-US" smtClean="0"/>
-              <a:t>1/27/13</a:t>
+              <a:t>5/10/2026</a:t>
             </a:fld>
             <a:endParaRPr lang="en-US"/>
           </a:p>
@@ -2734,7 +2750,7 @@
           <a:p>
             <a:fld id="{5BCAD085-E8A6-8845-BD4E-CB4CCA059FC4}" type="datetimeFigureOut">
               <a:rPr lang="en-US" smtClean="0"/>
-              <a:t>1/27/13</a:t>
+              <a:t>5/10/2026</a:t>
             </a:fld>
             <a:endParaRPr lang="en-US"/>
           </a:p>
@@ -3093,7 +3109,7 @@
 </file>
 
 <file path=ppt/slides/slide1.xml><?xml version="1.0" encoding="utf-8"?>
-<p:sld xmlns:a="http://schemas.openxmlformats.org/drawingml/2006/main" xmlns:p="http://schemas.openxmlformats.org/presentationml/2006/main" xmlns:r="http://schemas.openxmlformats.org/officeDocument/2006/relationships">
+<p:sld xmlns:a="http://schemas.openxmlformats.org/drawingml/2006/main" xmlns:r="http://schemas.openxmlformats.org/officeDocument/2006/relationships" xmlns:p="http://schemas.openxmlformats.org/presentationml/2006/main">
   <p:cSld>
     <p:bg>
       <p:bgPr>
@@ -3109,7 +3125,14 @@
         <p:cNvGrpSpPr/>
         <p:nvPr/>
       </p:nvGrpSpPr>
-      <p:grpSpPr/>
+      <p:grpSpPr>
+        <a:xfrm>
+          <a:off x="0" y="0"/>
+          <a:ext cx="0" cy="0"/>
+          <a:chOff x="0" y="0"/>
+          <a:chExt cx="0" cy="0"/>
+        </a:xfrm>
+      </p:grpSpPr>
       <p:sp>
         <p:nvSpPr>
           <p:cNvPr id="2" name="TextBox 1"/>
@@ -3222,6 +3245,7 @@
           <a:lstStyle/>
           <a:p>
             <a:pPr algn="ctr"/>
+            <a:endParaRPr/>
           </a:p>
         </p:txBody>
       </p:sp>
@@ -3375,7 +3399,7 @@
           </a:fontRef>
         </p:style>
         <p:txBody>
-          <a:bodyPr rtlCol="0" anchor="ctr" lIns="219456" rIns="219456" tIns="164592"/>
+          <a:bodyPr lIns="219456" tIns="164592" rIns="219456" rtlCol="0" anchor="ctr"/>
           <a:lstStyle/>
           <a:p>
             <a:pPr algn="ctr">
@@ -3404,7 +3428,7 @@
 </file>
 
 <file path=ppt/slides/slide10.xml><?xml version="1.0" encoding="utf-8"?>
-<p:sld xmlns:a="http://schemas.openxmlformats.org/drawingml/2006/main" xmlns:p="http://schemas.openxmlformats.org/presentationml/2006/main" xmlns:r="http://schemas.openxmlformats.org/officeDocument/2006/relationships">
+<p:sld xmlns:a="http://schemas.openxmlformats.org/drawingml/2006/main" xmlns:r="http://schemas.openxmlformats.org/officeDocument/2006/relationships" xmlns:p="http://schemas.openxmlformats.org/presentationml/2006/main">
   <p:cSld>
     <p:bg>
       <p:bgPr>
@@ -3420,7 +3444,14 @@
         <p:cNvGrpSpPr/>
         <p:nvPr/>
       </p:nvGrpSpPr>
-      <p:grpSpPr/>
+      <p:grpSpPr>
+        <a:xfrm>
+          <a:off x="0" y="0"/>
+          <a:ext cx="0" cy="0"/>
+          <a:chOff x="0" y="0"/>
+          <a:chExt cx="0" cy="0"/>
+        </a:xfrm>
+      </p:grpSpPr>
       <p:sp>
         <p:nvSpPr>
           <p:cNvPr id="2" name="TextBox 1"/>
@@ -3498,6 +3529,7 @@
           <a:lstStyle/>
           <a:p>
             <a:pPr algn="ctr"/>
+            <a:endParaRPr/>
           </a:p>
         </p:txBody>
       </p:sp>
@@ -3669,7 +3701,7 @@
           </a:fontRef>
         </p:style>
         <p:txBody>
-          <a:bodyPr rtlCol="0" anchor="ctr" lIns="219456" rIns="219456" tIns="164592"/>
+          <a:bodyPr lIns="219456" tIns="164592" rIns="219456" rtlCol="0" anchor="ctr"/>
           <a:lstStyle/>
           <a:p>
             <a:pPr algn="ctr">
@@ -3698,7 +3730,7 @@
 </file>
 
 <file path=ppt/slides/slide11.xml><?xml version="1.0" encoding="utf-8"?>
-<p:sld xmlns:a="http://schemas.openxmlformats.org/drawingml/2006/main" xmlns:p="http://schemas.openxmlformats.org/presentationml/2006/main" xmlns:r="http://schemas.openxmlformats.org/officeDocument/2006/relationships">
+<p:sld xmlns:a="http://schemas.openxmlformats.org/drawingml/2006/main" xmlns:r="http://schemas.openxmlformats.org/officeDocument/2006/relationships" xmlns:p="http://schemas.openxmlformats.org/presentationml/2006/main">
   <p:cSld>
     <p:bg>
       <p:bgPr>
@@ -3714,7 +3746,14 @@
         <p:cNvGrpSpPr/>
         <p:nvPr/>
       </p:nvGrpSpPr>
-      <p:grpSpPr/>
+      <p:grpSpPr>
+        <a:xfrm>
+          <a:off x="0" y="0"/>
+          <a:ext cx="0" cy="0"/>
+          <a:chOff x="0" y="0"/>
+          <a:chExt cx="0" cy="0"/>
+        </a:xfrm>
+      </p:grpSpPr>
       <p:sp>
         <p:nvSpPr>
           <p:cNvPr id="2" name="TextBox 1"/>
@@ -3792,6 +3831,7 @@
           <a:lstStyle/>
           <a:p>
             <a:pPr algn="ctr"/>
+            <a:endParaRPr/>
           </a:p>
         </p:txBody>
       </p:sp>
@@ -3958,7 +3998,7 @@
 </file>
 
 <file path=ppt/slides/slide12.xml><?xml version="1.0" encoding="utf-8"?>
-<p:sld xmlns:a="http://schemas.openxmlformats.org/drawingml/2006/main" xmlns:p="http://schemas.openxmlformats.org/presentationml/2006/main" xmlns:r="http://schemas.openxmlformats.org/officeDocument/2006/relationships">
+<p:sld xmlns:a="http://schemas.openxmlformats.org/drawingml/2006/main" xmlns:r="http://schemas.openxmlformats.org/officeDocument/2006/relationships" xmlns:p="http://schemas.openxmlformats.org/presentationml/2006/main">
   <p:cSld>
     <p:bg>
       <p:bgPr>
@@ -3974,7 +4014,14 @@
         <p:cNvGrpSpPr/>
         <p:nvPr/>
       </p:nvGrpSpPr>
-      <p:grpSpPr/>
+      <p:grpSpPr>
+        <a:xfrm>
+          <a:off x="0" y="0"/>
+          <a:ext cx="0" cy="0"/>
+          <a:chOff x="0" y="0"/>
+          <a:chExt cx="0" cy="0"/>
+        </a:xfrm>
+      </p:grpSpPr>
       <p:sp>
         <p:nvSpPr>
           <p:cNvPr id="2" name="TextBox 1"/>
@@ -4052,6 +4099,7 @@
           <a:lstStyle/>
           <a:p>
             <a:pPr algn="ctr"/>
+            <a:endParaRPr/>
           </a:p>
         </p:txBody>
       </p:sp>
@@ -4218,7 +4266,7 @@
 </file>
 
 <file path=ppt/slides/slide13.xml><?xml version="1.0" encoding="utf-8"?>
-<p:sld xmlns:a="http://schemas.openxmlformats.org/drawingml/2006/main" xmlns:p="http://schemas.openxmlformats.org/presentationml/2006/main" xmlns:r="http://schemas.openxmlformats.org/officeDocument/2006/relationships">
+<p:sld xmlns:a="http://schemas.openxmlformats.org/drawingml/2006/main" xmlns:r="http://schemas.openxmlformats.org/officeDocument/2006/relationships" xmlns:p="http://schemas.openxmlformats.org/presentationml/2006/main">
   <p:cSld>
     <p:bg>
       <p:bgPr>
@@ -4234,7 +4282,14 @@
         <p:cNvGrpSpPr/>
         <p:nvPr/>
       </p:nvGrpSpPr>
-      <p:grpSpPr/>
+      <p:grpSpPr>
+        <a:xfrm>
+          <a:off x="0" y="0"/>
+          <a:ext cx="0" cy="0"/>
+          <a:chOff x="0" y="0"/>
+          <a:chExt cx="0" cy="0"/>
+        </a:xfrm>
+      </p:grpSpPr>
       <p:sp>
         <p:nvSpPr>
           <p:cNvPr id="2" name="TextBox 1"/>
@@ -4347,6 +4402,7 @@
           <a:lstStyle/>
           <a:p>
             <a:pPr algn="ctr"/>
+            <a:endParaRPr/>
           </a:p>
         </p:txBody>
       </p:sp>
@@ -4495,7 +4551,7 @@
 </file>
 
 <file path=ppt/slides/slide14.xml><?xml version="1.0" encoding="utf-8"?>
-<p:sld xmlns:a="http://schemas.openxmlformats.org/drawingml/2006/main" xmlns:p="http://schemas.openxmlformats.org/presentationml/2006/main" xmlns:r="http://schemas.openxmlformats.org/officeDocument/2006/relationships">
+<p:sld xmlns:a="http://schemas.openxmlformats.org/drawingml/2006/main" xmlns:r="http://schemas.openxmlformats.org/officeDocument/2006/relationships" xmlns:p="http://schemas.openxmlformats.org/presentationml/2006/main">
   <p:cSld>
     <p:bg>
       <p:bgPr>
@@ -4511,7 +4567,14 @@
         <p:cNvGrpSpPr/>
         <p:nvPr/>
       </p:nvGrpSpPr>
-      <p:grpSpPr/>
+      <p:grpSpPr>
+        <a:xfrm>
+          <a:off x="0" y="0"/>
+          <a:ext cx="0" cy="0"/>
+          <a:chOff x="0" y="0"/>
+          <a:chExt cx="0" cy="0"/>
+        </a:xfrm>
+      </p:grpSpPr>
       <p:sp>
         <p:nvSpPr>
           <p:cNvPr id="2" name="TextBox 1"/>
@@ -4589,6 +4652,7 @@
           <a:lstStyle/>
           <a:p>
             <a:pPr algn="ctr"/>
+            <a:endParaRPr/>
           </a:p>
         </p:txBody>
       </p:sp>
@@ -4760,7 +4824,7 @@
           </a:fontRef>
         </p:style>
         <p:txBody>
-          <a:bodyPr rtlCol="0" anchor="ctr" lIns="219456" rIns="219456" tIns="164592"/>
+          <a:bodyPr lIns="219456" tIns="164592" rIns="219456" rtlCol="0" anchor="ctr"/>
           <a:lstStyle/>
           <a:p>
             <a:pPr algn="ctr">
@@ -4789,7 +4853,7 @@
 </file>
 
 <file path=ppt/slides/slide15.xml><?xml version="1.0" encoding="utf-8"?>
-<p:sld xmlns:a="http://schemas.openxmlformats.org/drawingml/2006/main" xmlns:p="http://schemas.openxmlformats.org/presentationml/2006/main" xmlns:r="http://schemas.openxmlformats.org/officeDocument/2006/relationships">
+<p:sld xmlns:a="http://schemas.openxmlformats.org/drawingml/2006/main" xmlns:r="http://schemas.openxmlformats.org/officeDocument/2006/relationships" xmlns:p="http://schemas.openxmlformats.org/presentationml/2006/main">
   <p:cSld>
     <p:bg>
       <p:bgPr>
@@ -4805,7 +4869,14 @@
         <p:cNvGrpSpPr/>
         <p:nvPr/>
       </p:nvGrpSpPr>
-      <p:grpSpPr/>
+      <p:grpSpPr>
+        <a:xfrm>
+          <a:off x="0" y="0"/>
+          <a:ext cx="0" cy="0"/>
+          <a:chOff x="0" y="0"/>
+          <a:chExt cx="0" cy="0"/>
+        </a:xfrm>
+      </p:grpSpPr>
       <p:sp>
         <p:nvSpPr>
           <p:cNvPr id="2" name="TextBox 1"/>
@@ -4883,6 +4954,7 @@
           <a:lstStyle/>
           <a:p>
             <a:pPr algn="ctr"/>
+            <a:endParaRPr/>
           </a:p>
         </p:txBody>
       </p:sp>
@@ -5043,7 +5115,7 @@
 </file>
 
 <file path=ppt/slides/slide2.xml><?xml version="1.0" encoding="utf-8"?>
-<p:sld xmlns:a="http://schemas.openxmlformats.org/drawingml/2006/main" xmlns:p="http://schemas.openxmlformats.org/presentationml/2006/main" xmlns:r="http://schemas.openxmlformats.org/officeDocument/2006/relationships">
+<p:sld xmlns:a="http://schemas.openxmlformats.org/drawingml/2006/main" xmlns:r="http://schemas.openxmlformats.org/officeDocument/2006/relationships" xmlns:p="http://schemas.openxmlformats.org/presentationml/2006/main">
   <p:cSld>
     <p:bg>
       <p:bgPr>
@@ -5059,7 +5131,14 @@
         <p:cNvGrpSpPr/>
         <p:nvPr/>
       </p:nvGrpSpPr>
-      <p:grpSpPr/>
+      <p:grpSpPr>
+        <a:xfrm>
+          <a:off x="0" y="0"/>
+          <a:ext cx="0" cy="0"/>
+          <a:chOff x="0" y="0"/>
+          <a:chExt cx="0" cy="0"/>
+        </a:xfrm>
+      </p:grpSpPr>
       <p:sp>
         <p:nvSpPr>
           <p:cNvPr id="2" name="TextBox 1"/>
@@ -5137,6 +5216,7 @@
           <a:lstStyle/>
           <a:p>
             <a:pPr algn="ctr"/>
+            <a:endParaRPr/>
           </a:p>
         </p:txBody>
       </p:sp>
@@ -5308,7 +5388,7 @@
           </a:fontRef>
         </p:style>
         <p:txBody>
-          <a:bodyPr rtlCol="0" anchor="ctr" lIns="219456" rIns="219456" tIns="164592"/>
+          <a:bodyPr lIns="219456" tIns="164592" rIns="219456" rtlCol="0" anchor="ctr"/>
           <a:lstStyle/>
           <a:p>
             <a:pPr algn="ctr">
@@ -5333,7 +5413,7 @@
 </file>
 
 <file path=ppt/slides/slide3.xml><?xml version="1.0" encoding="utf-8"?>
-<p:sld xmlns:a="http://schemas.openxmlformats.org/drawingml/2006/main" xmlns:p="http://schemas.openxmlformats.org/presentationml/2006/main" xmlns:r="http://schemas.openxmlformats.org/officeDocument/2006/relationships">
+<p:sld xmlns:a="http://schemas.openxmlformats.org/drawingml/2006/main" xmlns:r="http://schemas.openxmlformats.org/officeDocument/2006/relationships" xmlns:p="http://schemas.openxmlformats.org/presentationml/2006/main">
   <p:cSld>
     <p:bg>
       <p:bgPr>
@@ -5349,7 +5429,14 @@
         <p:cNvGrpSpPr/>
         <p:nvPr/>
       </p:nvGrpSpPr>
-      <p:grpSpPr/>
+      <p:grpSpPr>
+        <a:xfrm>
+          <a:off x="0" y="0"/>
+          <a:ext cx="0" cy="0"/>
+          <a:chOff x="0" y="0"/>
+          <a:chExt cx="0" cy="0"/>
+        </a:xfrm>
+      </p:grpSpPr>
       <p:sp>
         <p:nvSpPr>
           <p:cNvPr id="2" name="TextBox 1"/>
@@ -5427,6 +5514,7 @@
           <a:lstStyle/>
           <a:p>
             <a:pPr algn="ctr"/>
+            <a:endParaRPr/>
           </a:p>
         </p:txBody>
       </p:sp>
@@ -5785,7 +5873,7 @@
 </file>
 
 <file path=ppt/slides/slide4.xml><?xml version="1.0" encoding="utf-8"?>
-<p:sld xmlns:a="http://schemas.openxmlformats.org/drawingml/2006/main" xmlns:p="http://schemas.openxmlformats.org/presentationml/2006/main" xmlns:r="http://schemas.openxmlformats.org/officeDocument/2006/relationships">
+<p:sld xmlns:a="http://schemas.openxmlformats.org/drawingml/2006/main" xmlns:r="http://schemas.openxmlformats.org/officeDocument/2006/relationships" xmlns:p="http://schemas.openxmlformats.org/presentationml/2006/main">
   <p:cSld>
     <p:bg>
       <p:bgPr>
@@ -5801,7 +5889,14 @@
         <p:cNvGrpSpPr/>
         <p:nvPr/>
       </p:nvGrpSpPr>
-      <p:grpSpPr/>
+      <p:grpSpPr>
+        <a:xfrm>
+          <a:off x="0" y="0"/>
+          <a:ext cx="0" cy="0"/>
+          <a:chOff x="0" y="0"/>
+          <a:chExt cx="0" cy="0"/>
+        </a:xfrm>
+      </p:grpSpPr>
       <p:sp>
         <p:nvSpPr>
           <p:cNvPr id="2" name="TextBox 1"/>
@@ -5879,6 +5974,7 @@
           <a:lstStyle/>
           <a:p>
             <a:pPr algn="ctr"/>
+            <a:endParaRPr/>
           </a:p>
         </p:txBody>
       </p:sp>
@@ -6050,7 +6146,7 @@
           </a:fontRef>
         </p:style>
         <p:txBody>
-          <a:bodyPr rtlCol="0" anchor="ctr" lIns="219456" rIns="219456" tIns="164592"/>
+          <a:bodyPr lIns="219456" tIns="164592" rIns="219456" rtlCol="0" anchor="ctr"/>
           <a:lstStyle/>
           <a:p>
             <a:pPr algn="ctr">
@@ -6068,6 +6164,9 @@
               <a:t>EPSG:5514</a:t>
             </a:r>
             <a:br/>
+            <a:r>
+              <a:t/>
+            </a:r>
             <a:br/>
             <a:r>
               <a:t>Dotazy:</a:t>
@@ -6088,7 +6187,7 @@
 </file>
 
 <file path=ppt/slides/slide5.xml><?xml version="1.0" encoding="utf-8"?>
-<p:sld xmlns:a="http://schemas.openxmlformats.org/drawingml/2006/main" xmlns:p="http://schemas.openxmlformats.org/presentationml/2006/main" xmlns:r="http://schemas.openxmlformats.org/officeDocument/2006/relationships">
+<p:sld xmlns:a="http://schemas.openxmlformats.org/drawingml/2006/main" xmlns:r="http://schemas.openxmlformats.org/officeDocument/2006/relationships" xmlns:p="http://schemas.openxmlformats.org/presentationml/2006/main">
   <p:cSld>
     <p:bg>
       <p:bgPr>
@@ -6104,7 +6203,14 @@
         <p:cNvGrpSpPr/>
         <p:nvPr/>
       </p:nvGrpSpPr>
-      <p:grpSpPr/>
+      <p:grpSpPr>
+        <a:xfrm>
+          <a:off x="0" y="0"/>
+          <a:ext cx="0" cy="0"/>
+          <a:chOff x="0" y="0"/>
+          <a:chExt cx="0" cy="0"/>
+        </a:xfrm>
+      </p:grpSpPr>
       <p:sp>
         <p:nvSpPr>
           <p:cNvPr id="2" name="TextBox 1"/>
@@ -6182,6 +6288,7 @@
           <a:lstStyle/>
           <a:p>
             <a:pPr algn="ctr"/>
+            <a:endParaRPr/>
           </a:p>
         </p:txBody>
       </p:sp>
@@ -6627,7 +6734,7 @@
 </file>
 
 <file path=ppt/slides/slide6.xml><?xml version="1.0" encoding="utf-8"?>
-<p:sld xmlns:a="http://schemas.openxmlformats.org/drawingml/2006/main" xmlns:p="http://schemas.openxmlformats.org/presentationml/2006/main" xmlns:r="http://schemas.openxmlformats.org/officeDocument/2006/relationships">
+<p:sld xmlns:a="http://schemas.openxmlformats.org/drawingml/2006/main" xmlns:r="http://schemas.openxmlformats.org/officeDocument/2006/relationships" xmlns:p="http://schemas.openxmlformats.org/presentationml/2006/main">
   <p:cSld>
     <p:bg>
       <p:bgPr>
@@ -6643,7 +6750,14 @@
         <p:cNvGrpSpPr/>
         <p:nvPr/>
       </p:nvGrpSpPr>
-      <p:grpSpPr/>
+      <p:grpSpPr>
+        <a:xfrm>
+          <a:off x="0" y="0"/>
+          <a:ext cx="0" cy="0"/>
+          <a:chOff x="0" y="0"/>
+          <a:chExt cx="0" cy="0"/>
+        </a:xfrm>
+      </p:grpSpPr>
       <p:sp>
         <p:nvSpPr>
           <p:cNvPr id="2" name="TextBox 1"/>
@@ -6721,6 +6835,7 @@
           <a:lstStyle/>
           <a:p>
             <a:pPr algn="ctr"/>
+            <a:endParaRPr/>
           </a:p>
         </p:txBody>
       </p:sp>
@@ -7184,7 +7299,7 @@
 </file>
 
 <file path=ppt/slides/slide7.xml><?xml version="1.0" encoding="utf-8"?>
-<p:sld xmlns:a="http://schemas.openxmlformats.org/drawingml/2006/main" xmlns:p="http://schemas.openxmlformats.org/presentationml/2006/main" xmlns:r="http://schemas.openxmlformats.org/officeDocument/2006/relationships">
+<p:sld xmlns:a="http://schemas.openxmlformats.org/drawingml/2006/main" xmlns:r="http://schemas.openxmlformats.org/officeDocument/2006/relationships" xmlns:p="http://schemas.openxmlformats.org/presentationml/2006/main">
   <p:cSld>
     <p:bg>
       <p:bgPr>
@@ -7200,7 +7315,14 @@
         <p:cNvGrpSpPr/>
         <p:nvPr/>
       </p:nvGrpSpPr>
-      <p:grpSpPr/>
+      <p:grpSpPr>
+        <a:xfrm>
+          <a:off x="0" y="0"/>
+          <a:ext cx="0" cy="0"/>
+          <a:chOff x="0" y="0"/>
+          <a:chExt cx="0" cy="0"/>
+        </a:xfrm>
+      </p:grpSpPr>
       <p:sp>
         <p:nvSpPr>
           <p:cNvPr id="2" name="TextBox 1"/>
@@ -7278,6 +7400,7 @@
           <a:lstStyle/>
           <a:p>
             <a:pPr algn="ctr"/>
+            <a:endParaRPr/>
           </a:p>
         </p:txBody>
       </p:sp>
@@ -7741,7 +7864,7 @@
 </file>
 
 <file path=ppt/slides/slide8.xml><?xml version="1.0" encoding="utf-8"?>
-<p:sld xmlns:a="http://schemas.openxmlformats.org/drawingml/2006/main" xmlns:p="http://schemas.openxmlformats.org/presentationml/2006/main" xmlns:r="http://schemas.openxmlformats.org/officeDocument/2006/relationships">
+<p:sld xmlns:a="http://schemas.openxmlformats.org/drawingml/2006/main" xmlns:r="http://schemas.openxmlformats.org/officeDocument/2006/relationships" xmlns:p="http://schemas.openxmlformats.org/presentationml/2006/main">
   <p:cSld>
     <p:bg>
       <p:bgPr>
@@ -7757,7 +7880,14 @@
         <p:cNvGrpSpPr/>
         <p:nvPr/>
       </p:nvGrpSpPr>
-      <p:grpSpPr/>
+      <p:grpSpPr>
+        <a:xfrm>
+          <a:off x="0" y="0"/>
+          <a:ext cx="0" cy="0"/>
+          <a:chOff x="0" y="0"/>
+          <a:chExt cx="0" cy="0"/>
+        </a:xfrm>
+      </p:grpSpPr>
       <p:sp>
         <p:nvSpPr>
           <p:cNvPr id="2" name="TextBox 1"/>
@@ -7870,6 +8000,7 @@
           <a:lstStyle/>
           <a:p>
             <a:pPr algn="ctr"/>
+            <a:endParaRPr/>
           </a:p>
         </p:txBody>
       </p:sp>
@@ -8018,7 +8149,7 @@
 </file>
 
 <file path=ppt/slides/slide9.xml><?xml version="1.0" encoding="utf-8"?>
-<p:sld xmlns:a="http://schemas.openxmlformats.org/drawingml/2006/main" xmlns:p="http://schemas.openxmlformats.org/presentationml/2006/main" xmlns:r="http://schemas.openxmlformats.org/officeDocument/2006/relationships">
+<p:sld xmlns:a="http://schemas.openxmlformats.org/drawingml/2006/main" xmlns:r="http://schemas.openxmlformats.org/officeDocument/2006/relationships" xmlns:p="http://schemas.openxmlformats.org/presentationml/2006/main">
   <p:cSld>
     <p:bg>
       <p:bgPr>
@@ -8034,7 +8165,14 @@
         <p:cNvGrpSpPr/>
         <p:nvPr/>
       </p:nvGrpSpPr>
-      <p:grpSpPr/>
+      <p:grpSpPr>
+        <a:xfrm>
+          <a:off x="0" y="0"/>
+          <a:ext cx="0" cy="0"/>
+          <a:chOff x="0" y="0"/>
+          <a:chExt cx="0" cy="0"/>
+        </a:xfrm>
+      </p:grpSpPr>
       <p:sp>
         <p:nvSpPr>
           <p:cNvPr id="2" name="TextBox 1"/>
@@ -8147,6 +8285,7 @@
           <a:lstStyle/>
           <a:p>
             <a:pPr algn="ctr"/>
+            <a:endParaRPr/>
           </a:p>
         </p:txBody>
       </p:sp>

--- a/MH_semestralka_p__index/presentation/MH_semestralka_p__index_prezentace.pptx
+++ b/MH_semestralka_p__index/presentation/MH_semestralka_p__index_prezentace.pptx
@@ -13,13 +13,15 @@
     <p:sldId id="261" r:id="rId7"/>
     <p:sldId id="262" r:id="rId8"/>
     <p:sldId id="263" r:id="rId9"/>
-    <p:sldId id="264" r:id="rId10"/>
-    <p:sldId id="265" r:id="rId11"/>
-    <p:sldId id="266" r:id="rId12"/>
-    <p:sldId id="267" r:id="rId13"/>
-    <p:sldId id="268" r:id="rId14"/>
-    <p:sldId id="269" r:id="rId15"/>
-    <p:sldId id="270" r:id="rId16"/>
+    <p:sldId id="271" r:id="rId10"/>
+    <p:sldId id="264" r:id="rId11"/>
+    <p:sldId id="273" r:id="rId12"/>
+    <p:sldId id="265" r:id="rId13"/>
+    <p:sldId id="266" r:id="rId14"/>
+    <p:sldId id="272" r:id="rId15"/>
+    <p:sldId id="268" r:id="rId16"/>
+    <p:sldId id="269" r:id="rId17"/>
+    <p:sldId id="270" r:id="rId18"/>
   </p:sldIdLst>
   <p:sldSz cx="12192000" cy="6858000"/>
   <p:notesSz cx="6858000" cy="9144000"/>
@@ -318,7 +320,7 @@
           <a:p>
             <a:fld id="{5BCAD085-E8A6-8845-BD4E-CB4CCA059FC4}" type="datetimeFigureOut">
               <a:rPr lang="en-US" smtClean="0"/>
-              <a:t>5/10/2026</a:t>
+              <a:t>5/11/2026</a:t>
             </a:fld>
             <a:endParaRPr lang="en-US"/>
           </a:p>
@@ -488,7 +490,7 @@
           <a:p>
             <a:fld id="{5BCAD085-E8A6-8845-BD4E-CB4CCA059FC4}" type="datetimeFigureOut">
               <a:rPr lang="en-US" smtClean="0"/>
-              <a:t>5/10/2026</a:t>
+              <a:t>5/11/2026</a:t>
             </a:fld>
             <a:endParaRPr lang="en-US"/>
           </a:p>
@@ -668,7 +670,7 @@
           <a:p>
             <a:fld id="{5BCAD085-E8A6-8845-BD4E-CB4CCA059FC4}" type="datetimeFigureOut">
               <a:rPr lang="en-US" smtClean="0"/>
-              <a:t>5/10/2026</a:t>
+              <a:t>5/11/2026</a:t>
             </a:fld>
             <a:endParaRPr lang="en-US"/>
           </a:p>
@@ -838,7 +840,7 @@
           <a:p>
             <a:fld id="{5BCAD085-E8A6-8845-BD4E-CB4CCA059FC4}" type="datetimeFigureOut">
               <a:rPr lang="en-US" smtClean="0"/>
-              <a:t>5/10/2026</a:t>
+              <a:t>5/11/2026</a:t>
             </a:fld>
             <a:endParaRPr lang="en-US"/>
           </a:p>
@@ -1084,7 +1086,7 @@
           <a:p>
             <a:fld id="{5BCAD085-E8A6-8845-BD4E-CB4CCA059FC4}" type="datetimeFigureOut">
               <a:rPr lang="en-US" smtClean="0"/>
-              <a:t>5/10/2026</a:t>
+              <a:t>5/11/2026</a:t>
             </a:fld>
             <a:endParaRPr lang="en-US"/>
           </a:p>
@@ -1372,7 +1374,7 @@
           <a:p>
             <a:fld id="{5BCAD085-E8A6-8845-BD4E-CB4CCA059FC4}" type="datetimeFigureOut">
               <a:rPr lang="en-US" smtClean="0"/>
-              <a:t>5/10/2026</a:t>
+              <a:t>5/11/2026</a:t>
             </a:fld>
             <a:endParaRPr lang="en-US"/>
           </a:p>
@@ -1794,7 +1796,7 @@
           <a:p>
             <a:fld id="{5BCAD085-E8A6-8845-BD4E-CB4CCA059FC4}" type="datetimeFigureOut">
               <a:rPr lang="en-US" smtClean="0"/>
-              <a:t>5/10/2026</a:t>
+              <a:t>5/11/2026</a:t>
             </a:fld>
             <a:endParaRPr lang="en-US"/>
           </a:p>
@@ -1912,7 +1914,7 @@
           <a:p>
             <a:fld id="{5BCAD085-E8A6-8845-BD4E-CB4CCA059FC4}" type="datetimeFigureOut">
               <a:rPr lang="en-US" smtClean="0"/>
-              <a:t>5/10/2026</a:t>
+              <a:t>5/11/2026</a:t>
             </a:fld>
             <a:endParaRPr lang="en-US"/>
           </a:p>
@@ -2007,7 +2009,7 @@
           <a:p>
             <a:fld id="{5BCAD085-E8A6-8845-BD4E-CB4CCA059FC4}" type="datetimeFigureOut">
               <a:rPr lang="en-US" smtClean="0"/>
-              <a:t>5/10/2026</a:t>
+              <a:t>5/11/2026</a:t>
             </a:fld>
             <a:endParaRPr lang="en-US"/>
           </a:p>
@@ -2284,7 +2286,7 @@
           <a:p>
             <a:fld id="{5BCAD085-E8A6-8845-BD4E-CB4CCA059FC4}" type="datetimeFigureOut">
               <a:rPr lang="en-US" smtClean="0"/>
-              <a:t>5/10/2026</a:t>
+              <a:t>5/11/2026</a:t>
             </a:fld>
             <a:endParaRPr lang="en-US"/>
           </a:p>
@@ -2537,7 +2539,7 @@
           <a:p>
             <a:fld id="{5BCAD085-E8A6-8845-BD4E-CB4CCA059FC4}" type="datetimeFigureOut">
               <a:rPr lang="en-US" smtClean="0"/>
-              <a:t>5/10/2026</a:t>
+              <a:t>5/11/2026</a:t>
             </a:fld>
             <a:endParaRPr lang="en-US"/>
           </a:p>
@@ -2750,7 +2752,7 @@
           <a:p>
             <a:fld id="{5BCAD085-E8A6-8845-BD4E-CB4CCA059FC4}" type="datetimeFigureOut">
               <a:rPr lang="en-US" smtClean="0"/>
-              <a:t>5/10/2026</a:t>
+              <a:t>5/11/2026</a:t>
             </a:fld>
             <a:endParaRPr lang="en-US"/>
           </a:p>
@@ -3482,14 +3484,49 @@
               </a:defRPr>
             </a:pPr>
             <a:r>
-              <a:t>Co ukazuje škálování</a:t>
-            </a:r>
-          </a:p>
-        </p:txBody>
-      </p:sp>
-      <p:sp>
-        <p:nvSpPr>
-          <p:cNvPr id="3" name="Rectangle 2"/>
+              <a:t>Benchmark: Česká republika</a:t>
+            </a:r>
+          </a:p>
+        </p:txBody>
+      </p:sp>
+      <p:sp>
+        <p:nvSpPr>
+          <p:cNvPr id="3" name="TextBox 2"/>
+          <p:cNvSpPr txBox="1"/>
+          <p:nvPr/>
+        </p:nvSpPr>
+        <p:spPr>
+          <a:xfrm>
+            <a:off x="502920" y="932688"/>
+            <a:ext cx="11155680" cy="347472"/>
+          </a:xfrm>
+          <a:prstGeom prst="rect">
+            <a:avLst/>
+          </a:prstGeom>
+          <a:noFill/>
+        </p:spPr>
+        <p:txBody>
+          <a:bodyPr wrap="none">
+            <a:spAutoFit/>
+          </a:bodyPr>
+          <a:lstStyle/>
+          <a:p>
+            <a:pPr>
+              <a:defRPr sz="1100">
+                <a:solidFill>
+                  <a:srgbClr val="5F6973"/>
+                </a:solidFill>
+              </a:defRPr>
+            </a:pPr>
+            <a:r>
+              <a:t>Bbox query, dataset 50 000 bodů, 1 000 dotazů</a:t>
+            </a:r>
+          </a:p>
+        </p:txBody>
+      </p:sp>
+      <p:sp>
+        <p:nvSpPr>
+          <p:cNvPr id="4" name="Rectangle 3"/>
           <p:cNvSpPr/>
           <p:nvPr/>
         </p:nvSpPr>
@@ -3535,7 +3572,7 @@
       </p:sp>
       <p:sp>
         <p:nvSpPr>
-          <p:cNvPr id="4" name="TextBox 3"/>
+          <p:cNvPr id="5" name="TextBox 4"/>
           <p:cNvSpPr txBox="1"/>
           <p:nvPr/>
         </p:nvSpPr>
@@ -3563,21 +3600,21 @@
               </a:defRPr>
             </a:pPr>
             <a:r>
-              <a:t>MH_semestralka_p__index | 10</a:t>
-            </a:r>
-          </a:p>
-        </p:txBody>
-      </p:sp>
-      <p:sp>
-        <p:nvSpPr>
-          <p:cNvPr id="5" name="TextBox 4"/>
+              <a:t>MH_semestralka_p__index | 9</a:t>
+            </a:r>
+          </a:p>
+        </p:txBody>
+      </p:sp>
+      <p:sp>
+        <p:nvSpPr>
+          <p:cNvPr id="6" name="TextBox 5"/>
           <p:cNvSpPr txBox="1"/>
           <p:nvPr/>
         </p:nvSpPr>
         <p:spPr>
           <a:xfrm>
             <a:off x="685800" y="1417320"/>
-            <a:ext cx="7040880" cy="4754880"/>
+            <a:ext cx="5029200" cy="4754880"/>
           </a:xfrm>
           <a:prstGeom prst="rect">
             <a:avLst/>
@@ -3597,14 +3634,14 @@
               <a:spcAft>
                 <a:spcPts val="1000"/>
               </a:spcAft>
-              <a:defRPr sz="1800">
+              <a:defRPr sz="1600">
                 <a:solidFill>
                   <a:srgbClr val="202830"/>
                 </a:solidFill>
               </a:defRPr>
             </a:pPr>
             <a:r>
-              <a:t>Bez indexu je rozhodující hlavně počet bodů: každý dotaz musí projít vše.</a:t>
+              <a:t>Na větším území a větším datasetu je rozdíl mezi lineárním průchodem a indexem výraznější.</a:t>
             </a:r>
           </a:p>
           <a:p>
@@ -3615,14 +3652,14 @@
               <a:spcAft>
                 <a:spcPts val="1000"/>
               </a:spcAft>
-              <a:defRPr sz="1800">
+              <a:defRPr sz="1600">
                 <a:solidFill>
                   <a:srgbClr val="202830"/>
                 </a:solidFill>
               </a:defRPr>
             </a:pPr>
             <a:r>
-              <a:t>U indexu je rozhodující počet kandidátů v dotčených dlaždicích nebo bboxu.</a:t>
+              <a:t>Dlaždicový index drží nízké časy i pro větší dotazovací okna.</a:t>
             </a:r>
           </a:p>
           <a:p>
@@ -3633,94 +3670,42 @@
               <a:spcAft>
                 <a:spcPts val="1000"/>
               </a:spcAft>
-              <a:defRPr sz="1800">
+              <a:defRPr sz="1600">
                 <a:solidFill>
                   <a:srgbClr val="202830"/>
                 </a:solidFill>
               </a:defRPr>
             </a:pPr>
             <a:r>
-              <a:t>Čím menší část prostoru dotaz zasáhne, tím větší je přínos indexu.</a:t>
-            </a:r>
-          </a:p>
-          <a:p>
-            <a:pPr>
-              <a:lnSpc>
-                <a:spcPct val="108000"/>
-              </a:lnSpc>
-              <a:spcAft>
-                <a:spcPts val="1000"/>
-              </a:spcAft>
-              <a:defRPr sz="1800">
-                <a:solidFill>
-                  <a:srgbClr val="202830"/>
-                </a:solidFill>
-              </a:defRPr>
-            </a:pPr>
-            <a:r>
-              <a:t>Index má smysl hlavně při opakovaných dotazech nad stejným datasetem.</a:t>
-            </a:r>
-          </a:p>
-        </p:txBody>
-      </p:sp>
-      <p:sp>
-        <p:nvSpPr>
-          <p:cNvPr id="6" name="Rectangle 5"/>
-          <p:cNvSpPr/>
-          <p:nvPr/>
-        </p:nvSpPr>
-        <p:spPr>
-          <a:xfrm>
-            <a:off x="7635240" y="1874519"/>
-            <a:ext cx="3474720" cy="2560320"/>
-          </a:xfrm>
-          <a:prstGeom prst="rect">
-            <a:avLst/>
-          </a:prstGeom>
-          <a:solidFill>
-            <a:srgbClr val="FFFFFF"/>
-          </a:solidFill>
-          <a:ln w="12700">
-            <a:solidFill>
-              <a:srgbClr val="E2E8F0"/>
-            </a:solidFill>
-          </a:ln>
-        </p:spPr>
-        <p:style>
-          <a:lnRef idx="1">
-            <a:schemeClr val="accent1"/>
-          </a:lnRef>
-          <a:fillRef idx="3">
-            <a:schemeClr val="accent1"/>
-          </a:fillRef>
-          <a:effectRef idx="2">
-            <a:schemeClr val="accent1"/>
-          </a:effectRef>
-          <a:fontRef idx="minor">
-            <a:schemeClr val="lt1"/>
-          </a:fontRef>
-        </p:style>
-        <p:txBody>
-          <a:bodyPr lIns="219456" tIns="164592" rIns="219456" rtlCol="0" anchor="ctr"/>
-          <a:lstStyle/>
-          <a:p>
-            <a:pPr algn="ctr">
-              <a:defRPr sz="1800" b="1">
-                <a:solidFill>
-                  <a:srgbClr val="2C64AA"/>
-                </a:solidFill>
-              </a:defRPr>
-            </a:pPr>
-            <a:r>
-              <a:t>Obecné pravidlo:</a:t>
-            </a:r>
-            <a:br/>
-            <a:r>
-              <a:t>index se vyplatí, když sníží počet přesně testovaných bodů.</a:t>
-            </a:r>
-          </a:p>
-        </p:txBody>
-      </p:sp>
+              <a:t>U největšího okna roste počet kandidátů, takže roste i čas indexovaného dotazu.</a:t>
+            </a:r>
+          </a:p>
+        </p:txBody>
+      </p:sp>
+      <p:pic>
+        <p:nvPicPr>
+          <p:cNvPr id="7" name="Picture 6" descr="benchmark_ceska_republika.png"/>
+          <p:cNvPicPr>
+            <a:picLocks noChangeAspect="1"/>
+          </p:cNvPicPr>
+          <p:nvPr/>
+        </p:nvPicPr>
+        <p:blipFill>
+          <a:blip r:embed="rId2"/>
+          <a:stretch>
+            <a:fillRect/>
+          </a:stretch>
+        </p:blipFill>
+        <p:spPr>
+          <a:xfrm>
+            <a:off x="6172200" y="1417320"/>
+            <a:ext cx="5394960" cy="2995554"/>
+          </a:xfrm>
+          <a:prstGeom prst="rect">
+            <a:avLst/>
+          </a:prstGeom>
+        </p:spPr>
+      </p:pic>
     </p:spTree>
   </p:cSld>
   <p:clrMapOvr>
@@ -3732,14 +3717,6 @@
 <file path=ppt/slides/slide11.xml><?xml version="1.0" encoding="utf-8"?>
 <p:sld xmlns:a="http://schemas.openxmlformats.org/drawingml/2006/main" xmlns:r="http://schemas.openxmlformats.org/officeDocument/2006/relationships" xmlns:p="http://schemas.openxmlformats.org/presentationml/2006/main">
   <p:cSld>
-    <p:bg>
-      <p:bgPr>
-        <a:solidFill>
-          <a:srgbClr val="F8F9FB"/>
-        </a:solidFill>
-        <a:effectLst/>
-      </p:bgPr>
-    </p:bg>
     <p:spTree>
       <p:nvGrpSpPr>
         <p:cNvPr id="1" name=""/>
@@ -3754,220 +3731,9 @@
           <a:chExt cx="0" cy="0"/>
         </a:xfrm>
       </p:grpSpPr>
-      <p:sp>
-        <p:nvSpPr>
-          <p:cNvPr id="2" name="TextBox 1"/>
-          <p:cNvSpPr txBox="1"/>
-          <p:nvPr/>
-        </p:nvSpPr>
-        <p:spPr>
-          <a:xfrm>
-            <a:off x="502920" y="320040"/>
-            <a:ext cx="11155680" cy="658368"/>
-          </a:xfrm>
-          <a:prstGeom prst="rect">
-            <a:avLst/>
-          </a:prstGeom>
-          <a:noFill/>
-        </p:spPr>
-        <p:txBody>
-          <a:bodyPr wrap="none">
-            <a:spAutoFit/>
-          </a:bodyPr>
-          <a:lstStyle/>
-          <a:p>
-            <a:pPr>
-              <a:defRPr sz="2500" b="1">
-                <a:solidFill>
-                  <a:srgbClr val="202830"/>
-                </a:solidFill>
-              </a:defRPr>
-            </a:pPr>
-            <a:r>
-              <a:t>Radius query</a:t>
-            </a:r>
-          </a:p>
-        </p:txBody>
-      </p:sp>
-      <p:sp>
-        <p:nvSpPr>
-          <p:cNvPr id="3" name="Rectangle 2"/>
-          <p:cNvSpPr/>
-          <p:nvPr/>
-        </p:nvSpPr>
-        <p:spPr>
-          <a:xfrm>
-            <a:off x="502920" y="6537960"/>
-            <a:ext cx="11155680" cy="9144"/>
-          </a:xfrm>
-          <a:prstGeom prst="rect">
-            <a:avLst/>
-          </a:prstGeom>
-          <a:solidFill>
-            <a:srgbClr val="E2E8F0"/>
-          </a:solidFill>
-          <a:ln>
-            <a:solidFill>
-              <a:srgbClr val="E2E8F0"/>
-            </a:solidFill>
-          </a:ln>
-        </p:spPr>
-        <p:style>
-          <a:lnRef idx="1">
-            <a:schemeClr val="accent1"/>
-          </a:lnRef>
-          <a:fillRef idx="3">
-            <a:schemeClr val="accent1"/>
-          </a:fillRef>
-          <a:effectRef idx="2">
-            <a:schemeClr val="accent1"/>
-          </a:effectRef>
-          <a:fontRef idx="minor">
-            <a:schemeClr val="lt1"/>
-          </a:fontRef>
-        </p:style>
-        <p:txBody>
-          <a:bodyPr rtlCol="0" anchor="ctr"/>
-          <a:lstStyle/>
-          <a:p>
-            <a:pPr algn="ctr"/>
-            <a:endParaRPr/>
-          </a:p>
-        </p:txBody>
-      </p:sp>
-      <p:sp>
-        <p:nvSpPr>
-          <p:cNvPr id="4" name="TextBox 3"/>
-          <p:cNvSpPr txBox="1"/>
-          <p:nvPr/>
-        </p:nvSpPr>
-        <p:spPr>
-          <a:xfrm>
-            <a:off x="9692640" y="6565392"/>
-            <a:ext cx="1920240" cy="228600"/>
-          </a:xfrm>
-          <a:prstGeom prst="rect">
-            <a:avLst/>
-          </a:prstGeom>
-          <a:noFill/>
-        </p:spPr>
-        <p:txBody>
-          <a:bodyPr wrap="none">
-            <a:spAutoFit/>
-          </a:bodyPr>
-          <a:lstStyle/>
-          <a:p>
-            <a:pPr algn="r">
-              <a:defRPr sz="800">
-                <a:solidFill>
-                  <a:srgbClr val="5F6973"/>
-                </a:solidFill>
-              </a:defRPr>
-            </a:pPr>
-            <a:r>
-              <a:t>MH_semestralka_p__index | 11</a:t>
-            </a:r>
-          </a:p>
-        </p:txBody>
-      </p:sp>
-      <p:sp>
-        <p:nvSpPr>
-          <p:cNvPr id="5" name="TextBox 4"/>
-          <p:cNvSpPr txBox="1"/>
-          <p:nvPr/>
-        </p:nvSpPr>
-        <p:spPr>
-          <a:xfrm>
-            <a:off x="685800" y="1417320"/>
-            <a:ext cx="5029200" cy="4754880"/>
-          </a:xfrm>
-          <a:prstGeom prst="rect">
-            <a:avLst/>
-          </a:prstGeom>
-          <a:noFill/>
-        </p:spPr>
-        <p:txBody>
-          <a:bodyPr wrap="square" lIns="45720" rIns="45720">
-            <a:spAutoFit/>
-          </a:bodyPr>
-          <a:lstStyle/>
-          <a:p>
-            <a:pPr>
-              <a:lnSpc>
-                <a:spcPct val="108000"/>
-              </a:lnSpc>
-              <a:spcAft>
-                <a:spcPts val="1000"/>
-              </a:spcAft>
-              <a:defRPr sz="1600">
-                <a:solidFill>
-                  <a:srgbClr val="202830"/>
-                </a:solidFill>
-              </a:defRPr>
-            </a:pPr>
-            <a:r>
-              <a:t>Dotaz: najít všechny body do zadané vzdálenosti od středu.</a:t>
-            </a:r>
-          </a:p>
-          <a:p>
-            <a:pPr>
-              <a:lnSpc>
-                <a:spcPct val="108000"/>
-              </a:lnSpc>
-              <a:spcAft>
-                <a:spcPts val="1000"/>
-              </a:spcAft>
-              <a:defRPr sz="1600">
-                <a:solidFill>
-                  <a:srgbClr val="202830"/>
-                </a:solidFill>
-              </a:defRPr>
-            </a:pPr>
-            <a:r>
-              <a:t>Nejdřív se použije bbox kružnice jako hrubý filtr.</a:t>
-            </a:r>
-          </a:p>
-          <a:p>
-            <a:pPr>
-              <a:lnSpc>
-                <a:spcPct val="108000"/>
-              </a:lnSpc>
-              <a:spcAft>
-                <a:spcPts val="1000"/>
-              </a:spcAft>
-              <a:defRPr sz="1600">
-                <a:solidFill>
-                  <a:srgbClr val="202830"/>
-                </a:solidFill>
-              </a:defRPr>
-            </a:pPr>
-            <a:r>
-              <a:t>Potom musí následovat přesný test eukleidovské vzdálenosti.</a:t>
-            </a:r>
-          </a:p>
-          <a:p>
-            <a:pPr>
-              <a:lnSpc>
-                <a:spcPct val="108000"/>
-              </a:lnSpc>
-              <a:spcAft>
-                <a:spcPts val="1000"/>
-              </a:spcAft>
-              <a:defRPr sz="1600">
-                <a:solidFill>
-                  <a:srgbClr val="202830"/>
-                </a:solidFill>
-              </a:defRPr>
-            </a:pPr>
-            <a:r>
-              <a:t>Poloměry v benchmarku: 5 km, 10 km a 25 km.</a:t>
-            </a:r>
-          </a:p>
-        </p:txBody>
-      </p:sp>
       <p:pic>
         <p:nvPicPr>
-          <p:cNvPr id="6" name="Picture 5" descr="benchmark_radius_query.png"/>
+          <p:cNvPr id="2" name="Obrázek 1"/>
           <p:cNvPicPr>
             <a:picLocks noChangeAspect="1"/>
           </p:cNvPicPr>
@@ -3981,8 +3747,8 @@
         </p:blipFill>
         <p:spPr>
           <a:xfrm>
-            <a:off x="6172200" y="1417320"/>
-            <a:ext cx="5394960" cy="2995554"/>
+            <a:off x="81062" y="210312"/>
+            <a:ext cx="11937202" cy="5942423"/>
           </a:xfrm>
           <a:prstGeom prst="rect">
             <a:avLst/>
@@ -3990,6 +3756,11 @@
         </p:spPr>
       </p:pic>
     </p:spTree>
+    <p:extLst>
+      <p:ext uri="{BB962C8B-B14F-4D97-AF65-F5344CB8AC3E}">
+        <p14:creationId xmlns:p14="http://schemas.microsoft.com/office/powerpoint/2010/main" val="1141395382"/>
+      </p:ext>
+    </p:extLst>
   </p:cSld>
   <p:clrMapOvr>
     <a:masterClrMapping/>
@@ -4052,7 +3823,7 @@
               </a:defRPr>
             </a:pPr>
             <a:r>
-              <a:t>Polygon query</a:t>
+              <a:t>Co ukazuje škálování</a:t>
             </a:r>
           </a:p>
         </p:txBody>
@@ -4133,7 +3904,7 @@
               </a:defRPr>
             </a:pPr>
             <a:r>
-              <a:t>MH_semestralka_p__index | 12</a:t>
+              <a:t>MH_semestralka_p__index | 10</a:t>
             </a:r>
           </a:p>
         </p:txBody>
@@ -4147,7 +3918,7 @@
         <p:spPr>
           <a:xfrm>
             <a:off x="685800" y="1417320"/>
-            <a:ext cx="5029200" cy="4754880"/>
+            <a:ext cx="7040880" cy="4754880"/>
           </a:xfrm>
           <a:prstGeom prst="rect">
             <a:avLst/>
@@ -4167,14 +3938,14 @@
               <a:spcAft>
                 <a:spcPts val="1000"/>
               </a:spcAft>
-              <a:defRPr sz="1600">
+              <a:defRPr sz="1800">
                 <a:solidFill>
                   <a:srgbClr val="202830"/>
                 </a:solidFill>
               </a:defRPr>
             </a:pPr>
             <a:r>
-              <a:t>Dotaz: spočítat body ležící uvnitř nepravidelného polygonu kraje.</a:t>
+              <a:t>Bez indexu je rozhodující hlavně počet bodů: každý dotaz musí projít vše.</a:t>
             </a:r>
           </a:p>
           <a:p>
@@ -4185,14 +3956,14 @@
               <a:spcAft>
                 <a:spcPts val="1000"/>
               </a:spcAft>
-              <a:defRPr sz="1600">
+              <a:defRPr sz="1800">
                 <a:solidFill>
                   <a:srgbClr val="202830"/>
                 </a:solidFill>
               </a:defRPr>
             </a:pPr>
             <a:r>
-              <a:t>Index najde kandidáty podle bounding boxu polygonu.</a:t>
+              <a:t>U indexu je rozhodující počet kandidátů v dotčených dlaždicích nebo bboxu.</a:t>
             </a:r>
           </a:p>
           <a:p>
@@ -4203,14 +3974,14 @@
               <a:spcAft>
                 <a:spcPts val="1000"/>
               </a:spcAft>
-              <a:defRPr sz="1600">
+              <a:defRPr sz="1800">
                 <a:solidFill>
                   <a:srgbClr val="202830"/>
                 </a:solidFill>
               </a:defRPr>
             </a:pPr>
             <a:r>
-              <a:t>Finální výsledek určuje až přesný test vůči skutečné hranici kraje.</a:t>
+              <a:t>Čím menší část prostoru dotaz zasáhne, tím větší je přínos indexu.</a:t>
             </a:r>
           </a:p>
           <a:p>
@@ -4221,42 +3992,76 @@
               <a:spcAft>
                 <a:spcPts val="1000"/>
               </a:spcAft>
-              <a:defRPr sz="1600">
+              <a:defRPr sz="1800">
                 <a:solidFill>
                   <a:srgbClr val="202830"/>
                 </a:solidFill>
               </a:defRPr>
             </a:pPr>
             <a:r>
-              <a:t>Použito 14 skutečných krajů České republiky.</a:t>
-            </a:r>
-          </a:p>
-        </p:txBody>
-      </p:sp>
-      <p:pic>
-        <p:nvPicPr>
-          <p:cNvPr id="6" name="Picture 5" descr="polygon_counts_by_kraj.png"/>
-          <p:cNvPicPr>
-            <a:picLocks noChangeAspect="1"/>
-          </p:cNvPicPr>
-          <p:nvPr/>
-        </p:nvPicPr>
-        <p:blipFill>
-          <a:blip r:embed="rId2"/>
-          <a:stretch>
-            <a:fillRect/>
-          </a:stretch>
-        </p:blipFill>
-        <p:spPr>
-          <a:xfrm>
-            <a:off x="6172200" y="1417320"/>
-            <a:ext cx="5394960" cy="3311364"/>
-          </a:xfrm>
-          <a:prstGeom prst="rect">
-            <a:avLst/>
-          </a:prstGeom>
-        </p:spPr>
-      </p:pic>
+              <a:t>Index má smysl hlavně při opakovaných dotazech nad stejným datasetem.</a:t>
+            </a:r>
+          </a:p>
+        </p:txBody>
+      </p:sp>
+      <p:sp>
+        <p:nvSpPr>
+          <p:cNvPr id="6" name="Rectangle 5"/>
+          <p:cNvSpPr/>
+          <p:nvPr/>
+        </p:nvSpPr>
+        <p:spPr>
+          <a:xfrm>
+            <a:off x="7635240" y="1874519"/>
+            <a:ext cx="3474720" cy="2560320"/>
+          </a:xfrm>
+          <a:prstGeom prst="rect">
+            <a:avLst/>
+          </a:prstGeom>
+          <a:solidFill>
+            <a:srgbClr val="FFFFFF"/>
+          </a:solidFill>
+          <a:ln w="12700">
+            <a:solidFill>
+              <a:srgbClr val="E2E8F0"/>
+            </a:solidFill>
+          </a:ln>
+        </p:spPr>
+        <p:style>
+          <a:lnRef idx="1">
+            <a:schemeClr val="accent1"/>
+          </a:lnRef>
+          <a:fillRef idx="3">
+            <a:schemeClr val="accent1"/>
+          </a:fillRef>
+          <a:effectRef idx="2">
+            <a:schemeClr val="accent1"/>
+          </a:effectRef>
+          <a:fontRef idx="minor">
+            <a:schemeClr val="lt1"/>
+          </a:fontRef>
+        </p:style>
+        <p:txBody>
+          <a:bodyPr lIns="219456" tIns="164592" rIns="219456" rtlCol="0" anchor="ctr"/>
+          <a:lstStyle/>
+          <a:p>
+            <a:pPr algn="ctr">
+              <a:defRPr sz="1800" b="1">
+                <a:solidFill>
+                  <a:srgbClr val="2C64AA"/>
+                </a:solidFill>
+              </a:defRPr>
+            </a:pPr>
+            <a:r>
+              <a:t>Obecné pravidlo:</a:t>
+            </a:r>
+            <a:br/>
+            <a:r>
+              <a:t>index se vyplatí, když sníží počet přesně testovaných bodů.</a:t>
+            </a:r>
+          </a:p>
+        </p:txBody>
+      </p:sp>
     </p:spTree>
   </p:cSld>
   <p:clrMapOvr>
@@ -4320,49 +4125,14 @@
               </a:defRPr>
             </a:pPr>
             <a:r>
-              <a:t>Benchmark: polygon query</a:t>
-            </a:r>
-          </a:p>
-        </p:txBody>
-      </p:sp>
-      <p:sp>
-        <p:nvSpPr>
-          <p:cNvPr id="3" name="TextBox 2"/>
-          <p:cNvSpPr txBox="1"/>
-          <p:nvPr/>
-        </p:nvSpPr>
-        <p:spPr>
-          <a:xfrm>
-            <a:off x="502920" y="932688"/>
-            <a:ext cx="11155680" cy="347472"/>
-          </a:xfrm>
-          <a:prstGeom prst="rect">
-            <a:avLst/>
-          </a:prstGeom>
-          <a:noFill/>
-        </p:spPr>
-        <p:txBody>
-          <a:bodyPr wrap="none">
-            <a:spAutoFit/>
-          </a:bodyPr>
-          <a:lstStyle/>
-          <a:p>
-            <a:pPr>
-              <a:defRPr sz="1100">
-                <a:solidFill>
-                  <a:srgbClr val="5F6973"/>
-                </a:solidFill>
-              </a:defRPr>
-            </a:pPr>
-            <a:r>
-              <a:t>14 krajů ČR, souhrnný čas podle velikosti datasetu</a:t>
-            </a:r>
-          </a:p>
-        </p:txBody>
-      </p:sp>
-      <p:sp>
-        <p:nvSpPr>
-          <p:cNvPr id="4" name="Rectangle 3"/>
+              <a:t>Radius query</a:t>
+            </a:r>
+          </a:p>
+        </p:txBody>
+      </p:sp>
+      <p:sp>
+        <p:nvSpPr>
+          <p:cNvPr id="3" name="Rectangle 2"/>
           <p:cNvSpPr/>
           <p:nvPr/>
         </p:nvSpPr>
@@ -4408,7 +4178,7 @@
       </p:sp>
       <p:sp>
         <p:nvSpPr>
-          <p:cNvPr id="5" name="TextBox 4"/>
+          <p:cNvPr id="4" name="TextBox 3"/>
           <p:cNvSpPr txBox="1"/>
           <p:nvPr/>
         </p:nvSpPr>
@@ -4436,14 +4206,14 @@
               </a:defRPr>
             </a:pPr>
             <a:r>
-              <a:t>MH_semestralka_p__index | 13</a:t>
-            </a:r>
-          </a:p>
-        </p:txBody>
-      </p:sp>
-      <p:sp>
-        <p:nvSpPr>
-          <p:cNvPr id="6" name="TextBox 5"/>
+              <a:t>MH_semestralka_p__index | 11</a:t>
+            </a:r>
+          </a:p>
+        </p:txBody>
+      </p:sp>
+      <p:sp>
+        <p:nvSpPr>
+          <p:cNvPr id="5" name="TextBox 4"/>
           <p:cNvSpPr txBox="1"/>
           <p:nvPr/>
         </p:nvSpPr>
@@ -4477,7 +4247,7 @@
               </a:defRPr>
             </a:pPr>
             <a:r>
-              <a:t>U polygon query je přesné ověření kandidátů dražší než u bbox dotazu.</a:t>
+              <a:t>Dotaz: najít všechny body do zadané vzdálenosti od středu.</a:t>
             </a:r>
           </a:p>
           <a:p>
@@ -4495,7 +4265,7 @@
               </a:defRPr>
             </a:pPr>
             <a:r>
-              <a:t>Pro 50 000 bodů je nejrychlejší R-tree/STRtree, dlaždicový index je druhý.</a:t>
+              <a:t>Nejdřív se použije bbox kružnice jako hrubý filtr.</a:t>
             </a:r>
           </a:p>
           <a:p>
@@ -4513,14 +4283,32 @@
               </a:defRPr>
             </a:pPr>
             <a:r>
-              <a:t>U menších datasetů režie indexu může převážit nad přínosem.</a:t>
+              <a:t>Potom musí následovat přesný test eukleidovské vzdálenosti.</a:t>
+            </a:r>
+          </a:p>
+          <a:p>
+            <a:pPr>
+              <a:lnSpc>
+                <a:spcPct val="108000"/>
+              </a:lnSpc>
+              <a:spcAft>
+                <a:spcPts val="1000"/>
+              </a:spcAft>
+              <a:defRPr sz="1600">
+                <a:solidFill>
+                  <a:srgbClr val="202830"/>
+                </a:solidFill>
+              </a:defRPr>
+            </a:pPr>
+            <a:r>
+              <a:t>Poloměry v benchmarku: 5 km, 10 km a 25 km.</a:t>
             </a:r>
           </a:p>
         </p:txBody>
       </p:sp>
       <p:pic>
         <p:nvPicPr>
-          <p:cNvPr id="7" name="Picture 6" descr="benchmark_polygon_query.png"/>
+          <p:cNvPr id="6" name="Picture 5" descr="benchmark_radius_query.png"/>
           <p:cNvPicPr>
             <a:picLocks noChangeAspect="1"/>
           </p:cNvPicPr>
@@ -4551,6 +4339,60 @@
 </file>
 
 <file path=ppt/slides/slide14.xml><?xml version="1.0" encoding="utf-8"?>
+<p:sld xmlns:a="http://schemas.openxmlformats.org/drawingml/2006/main" xmlns:r="http://schemas.openxmlformats.org/officeDocument/2006/relationships" xmlns:p="http://schemas.openxmlformats.org/presentationml/2006/main">
+  <p:cSld>
+    <p:spTree>
+      <p:nvGrpSpPr>
+        <p:cNvPr id="1" name=""/>
+        <p:cNvGrpSpPr/>
+        <p:nvPr/>
+      </p:nvGrpSpPr>
+      <p:grpSpPr>
+        <a:xfrm>
+          <a:off x="0" y="0"/>
+          <a:ext cx="0" cy="0"/>
+          <a:chOff x="0" y="0"/>
+          <a:chExt cx="0" cy="0"/>
+        </a:xfrm>
+      </p:grpSpPr>
+      <p:pic>
+        <p:nvPicPr>
+          <p:cNvPr id="2" name="Obrázek 1"/>
+          <p:cNvPicPr>
+            <a:picLocks noChangeAspect="1"/>
+          </p:cNvPicPr>
+          <p:nvPr/>
+        </p:nvPicPr>
+        <p:blipFill>
+          <a:blip r:embed="rId2"/>
+          <a:stretch>
+            <a:fillRect/>
+          </a:stretch>
+        </p:blipFill>
+        <p:spPr>
+          <a:xfrm>
+            <a:off x="246888" y="241416"/>
+            <a:ext cx="11582289" cy="6216224"/>
+          </a:xfrm>
+          <a:prstGeom prst="rect">
+            <a:avLst/>
+          </a:prstGeom>
+        </p:spPr>
+      </p:pic>
+    </p:spTree>
+    <p:extLst>
+      <p:ext uri="{BB962C8B-B14F-4D97-AF65-F5344CB8AC3E}">
+        <p14:creationId xmlns:p14="http://schemas.microsoft.com/office/powerpoint/2010/main" val="3206834536"/>
+      </p:ext>
+    </p:extLst>
+  </p:cSld>
+  <p:clrMapOvr>
+    <a:masterClrMapping/>
+  </p:clrMapOvr>
+</p:sld>
+</file>
+
+<file path=ppt/slides/slide15.xml><?xml version="1.0" encoding="utf-8"?>
 <p:sld xmlns:a="http://schemas.openxmlformats.org/drawingml/2006/main" xmlns:r="http://schemas.openxmlformats.org/officeDocument/2006/relationships" xmlns:p="http://schemas.openxmlformats.org/presentationml/2006/main">
   <p:cSld>
     <p:bg>
@@ -4605,14 +4447,49 @@
               </a:defRPr>
             </a:pPr>
             <a:r>
-              <a:t>Radius vs. polygon query</a:t>
-            </a:r>
-          </a:p>
-        </p:txBody>
-      </p:sp>
-      <p:sp>
-        <p:nvSpPr>
-          <p:cNvPr id="3" name="Rectangle 2"/>
+              <a:t>Benchmark: polygon query</a:t>
+            </a:r>
+          </a:p>
+        </p:txBody>
+      </p:sp>
+      <p:sp>
+        <p:nvSpPr>
+          <p:cNvPr id="3" name="TextBox 2"/>
+          <p:cNvSpPr txBox="1"/>
+          <p:nvPr/>
+        </p:nvSpPr>
+        <p:spPr>
+          <a:xfrm>
+            <a:off x="502920" y="932688"/>
+            <a:ext cx="11155680" cy="347472"/>
+          </a:xfrm>
+          <a:prstGeom prst="rect">
+            <a:avLst/>
+          </a:prstGeom>
+          <a:noFill/>
+        </p:spPr>
+        <p:txBody>
+          <a:bodyPr wrap="none">
+            <a:spAutoFit/>
+          </a:bodyPr>
+          <a:lstStyle/>
+          <a:p>
+            <a:pPr>
+              <a:defRPr sz="1100">
+                <a:solidFill>
+                  <a:srgbClr val="5F6973"/>
+                </a:solidFill>
+              </a:defRPr>
+            </a:pPr>
+            <a:r>
+              <a:t>14 krajů ČR, souhrnný čas podle velikosti datasetu</a:t>
+            </a:r>
+          </a:p>
+        </p:txBody>
+      </p:sp>
+      <p:sp>
+        <p:nvSpPr>
+          <p:cNvPr id="4" name="Rectangle 3"/>
           <p:cNvSpPr/>
           <p:nvPr/>
         </p:nvSpPr>
@@ -4658,6 +4535,280 @@
       </p:sp>
       <p:sp>
         <p:nvSpPr>
+          <p:cNvPr id="5" name="TextBox 4"/>
+          <p:cNvSpPr txBox="1"/>
+          <p:nvPr/>
+        </p:nvSpPr>
+        <p:spPr>
+          <a:xfrm>
+            <a:off x="9692640" y="6565392"/>
+            <a:ext cx="1920240" cy="228600"/>
+          </a:xfrm>
+          <a:prstGeom prst="rect">
+            <a:avLst/>
+          </a:prstGeom>
+          <a:noFill/>
+        </p:spPr>
+        <p:txBody>
+          <a:bodyPr wrap="none">
+            <a:spAutoFit/>
+          </a:bodyPr>
+          <a:lstStyle/>
+          <a:p>
+            <a:pPr algn="r">
+              <a:defRPr sz="800">
+                <a:solidFill>
+                  <a:srgbClr val="5F6973"/>
+                </a:solidFill>
+              </a:defRPr>
+            </a:pPr>
+            <a:r>
+              <a:t>MH_semestralka_p__index | 13</a:t>
+            </a:r>
+          </a:p>
+        </p:txBody>
+      </p:sp>
+      <p:sp>
+        <p:nvSpPr>
+          <p:cNvPr id="6" name="TextBox 5"/>
+          <p:cNvSpPr txBox="1"/>
+          <p:nvPr/>
+        </p:nvSpPr>
+        <p:spPr>
+          <a:xfrm>
+            <a:off x="685800" y="1417320"/>
+            <a:ext cx="5029200" cy="4754880"/>
+          </a:xfrm>
+          <a:prstGeom prst="rect">
+            <a:avLst/>
+          </a:prstGeom>
+          <a:noFill/>
+        </p:spPr>
+        <p:txBody>
+          <a:bodyPr wrap="square" lIns="45720" rIns="45720">
+            <a:spAutoFit/>
+          </a:bodyPr>
+          <a:lstStyle/>
+          <a:p>
+            <a:pPr>
+              <a:lnSpc>
+                <a:spcPct val="108000"/>
+              </a:lnSpc>
+              <a:spcAft>
+                <a:spcPts val="1000"/>
+              </a:spcAft>
+              <a:defRPr sz="1600">
+                <a:solidFill>
+                  <a:srgbClr val="202830"/>
+                </a:solidFill>
+              </a:defRPr>
+            </a:pPr>
+            <a:r>
+              <a:t>U polygon query je přesné ověření kandidátů dražší než u bbox dotazu.</a:t>
+            </a:r>
+          </a:p>
+          <a:p>
+            <a:pPr>
+              <a:lnSpc>
+                <a:spcPct val="108000"/>
+              </a:lnSpc>
+              <a:spcAft>
+                <a:spcPts val="1000"/>
+              </a:spcAft>
+              <a:defRPr sz="1600">
+                <a:solidFill>
+                  <a:srgbClr val="202830"/>
+                </a:solidFill>
+              </a:defRPr>
+            </a:pPr>
+            <a:r>
+              <a:t>Pro 50 000 bodů je nejrychlejší R-tree/STRtree, dlaždicový index je druhý.</a:t>
+            </a:r>
+          </a:p>
+          <a:p>
+            <a:pPr>
+              <a:lnSpc>
+                <a:spcPct val="108000"/>
+              </a:lnSpc>
+              <a:spcAft>
+                <a:spcPts val="1000"/>
+              </a:spcAft>
+              <a:defRPr sz="1600">
+                <a:solidFill>
+                  <a:srgbClr val="202830"/>
+                </a:solidFill>
+              </a:defRPr>
+            </a:pPr>
+            <a:r>
+              <a:t>U menších datasetů režie indexu může převážit nad přínosem.</a:t>
+            </a:r>
+          </a:p>
+        </p:txBody>
+      </p:sp>
+      <p:pic>
+        <p:nvPicPr>
+          <p:cNvPr id="7" name="Picture 6" descr="benchmark_polygon_query.png"/>
+          <p:cNvPicPr>
+            <a:picLocks noChangeAspect="1"/>
+          </p:cNvPicPr>
+          <p:nvPr/>
+        </p:nvPicPr>
+        <p:blipFill>
+          <a:blip r:embed="rId2"/>
+          <a:stretch>
+            <a:fillRect/>
+          </a:stretch>
+        </p:blipFill>
+        <p:spPr>
+          <a:xfrm>
+            <a:off x="6172200" y="1417320"/>
+            <a:ext cx="5394960" cy="2995554"/>
+          </a:xfrm>
+          <a:prstGeom prst="rect">
+            <a:avLst/>
+          </a:prstGeom>
+        </p:spPr>
+      </p:pic>
+      <p:pic>
+        <p:nvPicPr>
+          <p:cNvPr id="8" name="Obrázek 7"/>
+          <p:cNvPicPr>
+            <a:picLocks noChangeAspect="1"/>
+          </p:cNvPicPr>
+          <p:nvPr/>
+        </p:nvPicPr>
+        <p:blipFill>
+          <a:blip r:embed="rId3"/>
+          <a:stretch>
+            <a:fillRect/>
+          </a:stretch>
+        </p:blipFill>
+        <p:spPr>
+          <a:xfrm>
+            <a:off x="198426" y="4383847"/>
+            <a:ext cx="11460174" cy="2295845"/>
+          </a:xfrm>
+          <a:prstGeom prst="rect">
+            <a:avLst/>
+          </a:prstGeom>
+        </p:spPr>
+      </p:pic>
+    </p:spTree>
+  </p:cSld>
+  <p:clrMapOvr>
+    <a:masterClrMapping/>
+  </p:clrMapOvr>
+</p:sld>
+</file>
+
+<file path=ppt/slides/slide16.xml><?xml version="1.0" encoding="utf-8"?>
+<p:sld xmlns:a="http://schemas.openxmlformats.org/drawingml/2006/main" xmlns:r="http://schemas.openxmlformats.org/officeDocument/2006/relationships" xmlns:p="http://schemas.openxmlformats.org/presentationml/2006/main">
+  <p:cSld>
+    <p:bg>
+      <p:bgPr>
+        <a:solidFill>
+          <a:srgbClr val="F8F9FB"/>
+        </a:solidFill>
+        <a:effectLst/>
+      </p:bgPr>
+    </p:bg>
+    <p:spTree>
+      <p:nvGrpSpPr>
+        <p:cNvPr id="1" name=""/>
+        <p:cNvGrpSpPr/>
+        <p:nvPr/>
+      </p:nvGrpSpPr>
+      <p:grpSpPr>
+        <a:xfrm>
+          <a:off x="0" y="0"/>
+          <a:ext cx="0" cy="0"/>
+          <a:chOff x="0" y="0"/>
+          <a:chExt cx="0" cy="0"/>
+        </a:xfrm>
+      </p:grpSpPr>
+      <p:sp>
+        <p:nvSpPr>
+          <p:cNvPr id="2" name="TextBox 1"/>
+          <p:cNvSpPr txBox="1"/>
+          <p:nvPr/>
+        </p:nvSpPr>
+        <p:spPr>
+          <a:xfrm>
+            <a:off x="502920" y="320040"/>
+            <a:ext cx="11155680" cy="658368"/>
+          </a:xfrm>
+          <a:prstGeom prst="rect">
+            <a:avLst/>
+          </a:prstGeom>
+          <a:noFill/>
+        </p:spPr>
+        <p:txBody>
+          <a:bodyPr wrap="none">
+            <a:spAutoFit/>
+          </a:bodyPr>
+          <a:lstStyle/>
+          <a:p>
+            <a:pPr>
+              <a:defRPr sz="2500" b="1">
+                <a:solidFill>
+                  <a:srgbClr val="202830"/>
+                </a:solidFill>
+              </a:defRPr>
+            </a:pPr>
+            <a:r>
+              <a:t>Radius vs. polygon query</a:t>
+            </a:r>
+          </a:p>
+        </p:txBody>
+      </p:sp>
+      <p:sp>
+        <p:nvSpPr>
+          <p:cNvPr id="3" name="Rectangle 2"/>
+          <p:cNvSpPr/>
+          <p:nvPr/>
+        </p:nvSpPr>
+        <p:spPr>
+          <a:xfrm>
+            <a:off x="502920" y="6537960"/>
+            <a:ext cx="11155680" cy="9144"/>
+          </a:xfrm>
+          <a:prstGeom prst="rect">
+            <a:avLst/>
+          </a:prstGeom>
+          <a:solidFill>
+            <a:srgbClr val="E2E8F0"/>
+          </a:solidFill>
+          <a:ln>
+            <a:solidFill>
+              <a:srgbClr val="E2E8F0"/>
+            </a:solidFill>
+          </a:ln>
+        </p:spPr>
+        <p:style>
+          <a:lnRef idx="1">
+            <a:schemeClr val="accent1"/>
+          </a:lnRef>
+          <a:fillRef idx="3">
+            <a:schemeClr val="accent1"/>
+          </a:fillRef>
+          <a:effectRef idx="2">
+            <a:schemeClr val="accent1"/>
+          </a:effectRef>
+          <a:fontRef idx="minor">
+            <a:schemeClr val="lt1"/>
+          </a:fontRef>
+        </p:style>
+        <p:txBody>
+          <a:bodyPr rtlCol="0" anchor="ctr"/>
+          <a:lstStyle/>
+          <a:p>
+            <a:pPr algn="ctr"/>
+            <a:endParaRPr/>
+          </a:p>
+        </p:txBody>
+      </p:sp>
+      <p:sp>
+        <p:nvSpPr>
           <p:cNvPr id="4" name="TextBox 3"/>
           <p:cNvSpPr txBox="1"/>
           <p:nvPr/>
@@ -4852,7 +5003,7 @@
 </p:sld>
 </file>
 
-<file path=ppt/slides/slide15.xml><?xml version="1.0" encoding="utf-8"?>
+<file path=ppt/slides/slide17.xml><?xml version="1.0" encoding="utf-8"?>
 <p:sld xmlns:a="http://schemas.openxmlformats.org/drawingml/2006/main" xmlns:r="http://schemas.openxmlformats.org/officeDocument/2006/relationships" xmlns:p="http://schemas.openxmlformats.org/presentationml/2006/main">
   <p:cSld>
     <p:bg>
@@ -8151,14 +8302,6 @@
 <file path=ppt/slides/slide9.xml><?xml version="1.0" encoding="utf-8"?>
 <p:sld xmlns:a="http://schemas.openxmlformats.org/drawingml/2006/main" xmlns:r="http://schemas.openxmlformats.org/officeDocument/2006/relationships" xmlns:p="http://schemas.openxmlformats.org/presentationml/2006/main">
   <p:cSld>
-    <p:bg>
-      <p:bgPr>
-        <a:solidFill>
-          <a:srgbClr val="F8F9FB"/>
-        </a:solidFill>
-        <a:effectLst/>
-      </p:bgPr>
-    </p:bg>
     <p:spTree>
       <p:nvGrpSpPr>
         <p:cNvPr id="1" name=""/>
@@ -8173,237 +8316,9 @@
           <a:chExt cx="0" cy="0"/>
         </a:xfrm>
       </p:grpSpPr>
-      <p:sp>
-        <p:nvSpPr>
-          <p:cNvPr id="2" name="TextBox 1"/>
-          <p:cNvSpPr txBox="1"/>
-          <p:nvPr/>
-        </p:nvSpPr>
-        <p:spPr>
-          <a:xfrm>
-            <a:off x="502920" y="320040"/>
-            <a:ext cx="11155680" cy="658368"/>
-          </a:xfrm>
-          <a:prstGeom prst="rect">
-            <a:avLst/>
-          </a:prstGeom>
-          <a:noFill/>
-        </p:spPr>
-        <p:txBody>
-          <a:bodyPr wrap="none">
-            <a:spAutoFit/>
-          </a:bodyPr>
-          <a:lstStyle/>
-          <a:p>
-            <a:pPr>
-              <a:defRPr sz="2500" b="1">
-                <a:solidFill>
-                  <a:srgbClr val="202830"/>
-                </a:solidFill>
-              </a:defRPr>
-            </a:pPr>
-            <a:r>
-              <a:t>Benchmark: Česká republika</a:t>
-            </a:r>
-          </a:p>
-        </p:txBody>
-      </p:sp>
-      <p:sp>
-        <p:nvSpPr>
-          <p:cNvPr id="3" name="TextBox 2"/>
-          <p:cNvSpPr txBox="1"/>
-          <p:nvPr/>
-        </p:nvSpPr>
-        <p:spPr>
-          <a:xfrm>
-            <a:off x="502920" y="932688"/>
-            <a:ext cx="11155680" cy="347472"/>
-          </a:xfrm>
-          <a:prstGeom prst="rect">
-            <a:avLst/>
-          </a:prstGeom>
-          <a:noFill/>
-        </p:spPr>
-        <p:txBody>
-          <a:bodyPr wrap="none">
-            <a:spAutoFit/>
-          </a:bodyPr>
-          <a:lstStyle/>
-          <a:p>
-            <a:pPr>
-              <a:defRPr sz="1100">
-                <a:solidFill>
-                  <a:srgbClr val="5F6973"/>
-                </a:solidFill>
-              </a:defRPr>
-            </a:pPr>
-            <a:r>
-              <a:t>Bbox query, dataset 50 000 bodů, 1 000 dotazů</a:t>
-            </a:r>
-          </a:p>
-        </p:txBody>
-      </p:sp>
-      <p:sp>
-        <p:nvSpPr>
-          <p:cNvPr id="4" name="Rectangle 3"/>
-          <p:cNvSpPr/>
-          <p:nvPr/>
-        </p:nvSpPr>
-        <p:spPr>
-          <a:xfrm>
-            <a:off x="502920" y="6537960"/>
-            <a:ext cx="11155680" cy="9144"/>
-          </a:xfrm>
-          <a:prstGeom prst="rect">
-            <a:avLst/>
-          </a:prstGeom>
-          <a:solidFill>
-            <a:srgbClr val="E2E8F0"/>
-          </a:solidFill>
-          <a:ln>
-            <a:solidFill>
-              <a:srgbClr val="E2E8F0"/>
-            </a:solidFill>
-          </a:ln>
-        </p:spPr>
-        <p:style>
-          <a:lnRef idx="1">
-            <a:schemeClr val="accent1"/>
-          </a:lnRef>
-          <a:fillRef idx="3">
-            <a:schemeClr val="accent1"/>
-          </a:fillRef>
-          <a:effectRef idx="2">
-            <a:schemeClr val="accent1"/>
-          </a:effectRef>
-          <a:fontRef idx="minor">
-            <a:schemeClr val="lt1"/>
-          </a:fontRef>
-        </p:style>
-        <p:txBody>
-          <a:bodyPr rtlCol="0" anchor="ctr"/>
-          <a:lstStyle/>
-          <a:p>
-            <a:pPr algn="ctr"/>
-            <a:endParaRPr/>
-          </a:p>
-        </p:txBody>
-      </p:sp>
-      <p:sp>
-        <p:nvSpPr>
-          <p:cNvPr id="5" name="TextBox 4"/>
-          <p:cNvSpPr txBox="1"/>
-          <p:nvPr/>
-        </p:nvSpPr>
-        <p:spPr>
-          <a:xfrm>
-            <a:off x="9692640" y="6565392"/>
-            <a:ext cx="1920240" cy="228600"/>
-          </a:xfrm>
-          <a:prstGeom prst="rect">
-            <a:avLst/>
-          </a:prstGeom>
-          <a:noFill/>
-        </p:spPr>
-        <p:txBody>
-          <a:bodyPr wrap="none">
-            <a:spAutoFit/>
-          </a:bodyPr>
-          <a:lstStyle/>
-          <a:p>
-            <a:pPr algn="r">
-              <a:defRPr sz="800">
-                <a:solidFill>
-                  <a:srgbClr val="5F6973"/>
-                </a:solidFill>
-              </a:defRPr>
-            </a:pPr>
-            <a:r>
-              <a:t>MH_semestralka_p__index | 9</a:t>
-            </a:r>
-          </a:p>
-        </p:txBody>
-      </p:sp>
-      <p:sp>
-        <p:nvSpPr>
-          <p:cNvPr id="6" name="TextBox 5"/>
-          <p:cNvSpPr txBox="1"/>
-          <p:nvPr/>
-        </p:nvSpPr>
-        <p:spPr>
-          <a:xfrm>
-            <a:off x="685800" y="1417320"/>
-            <a:ext cx="5029200" cy="4754880"/>
-          </a:xfrm>
-          <a:prstGeom prst="rect">
-            <a:avLst/>
-          </a:prstGeom>
-          <a:noFill/>
-        </p:spPr>
-        <p:txBody>
-          <a:bodyPr wrap="square" lIns="45720" rIns="45720">
-            <a:spAutoFit/>
-          </a:bodyPr>
-          <a:lstStyle/>
-          <a:p>
-            <a:pPr>
-              <a:lnSpc>
-                <a:spcPct val="108000"/>
-              </a:lnSpc>
-              <a:spcAft>
-                <a:spcPts val="1000"/>
-              </a:spcAft>
-              <a:defRPr sz="1600">
-                <a:solidFill>
-                  <a:srgbClr val="202830"/>
-                </a:solidFill>
-              </a:defRPr>
-            </a:pPr>
-            <a:r>
-              <a:t>Na větším území a větším datasetu je rozdíl mezi lineárním průchodem a indexem výraznější.</a:t>
-            </a:r>
-          </a:p>
-          <a:p>
-            <a:pPr>
-              <a:lnSpc>
-                <a:spcPct val="108000"/>
-              </a:lnSpc>
-              <a:spcAft>
-                <a:spcPts val="1000"/>
-              </a:spcAft>
-              <a:defRPr sz="1600">
-                <a:solidFill>
-                  <a:srgbClr val="202830"/>
-                </a:solidFill>
-              </a:defRPr>
-            </a:pPr>
-            <a:r>
-              <a:t>Dlaždicový index drží nízké časy i pro větší dotazovací okna.</a:t>
-            </a:r>
-          </a:p>
-          <a:p>
-            <a:pPr>
-              <a:lnSpc>
-                <a:spcPct val="108000"/>
-              </a:lnSpc>
-              <a:spcAft>
-                <a:spcPts val="1000"/>
-              </a:spcAft>
-              <a:defRPr sz="1600">
-                <a:solidFill>
-                  <a:srgbClr val="202830"/>
-                </a:solidFill>
-              </a:defRPr>
-            </a:pPr>
-            <a:r>
-              <a:t>U největšího okna roste počet kandidátů, takže roste i čas indexovaného dotazu.</a:t>
-            </a:r>
-          </a:p>
-        </p:txBody>
-      </p:sp>
       <p:pic>
         <p:nvPicPr>
-          <p:cNvPr id="7" name="Picture 6" descr="benchmark_ceska_republika.png"/>
+          <p:cNvPr id="2" name="Obrázek 1"/>
           <p:cNvPicPr>
             <a:picLocks noChangeAspect="1"/>
           </p:cNvPicPr>
@@ -8417,8 +8332,8 @@
         </p:blipFill>
         <p:spPr>
           <a:xfrm>
-            <a:off x="6172200" y="1417320"/>
-            <a:ext cx="5394960" cy="2995554"/>
+            <a:off x="356386" y="166232"/>
+            <a:ext cx="11479227" cy="6525536"/>
           </a:xfrm>
           <a:prstGeom prst="rect">
             <a:avLst/>
@@ -8426,6 +8341,11 @@
         </p:spPr>
       </p:pic>
     </p:spTree>
+    <p:extLst>
+      <p:ext uri="{BB962C8B-B14F-4D97-AF65-F5344CB8AC3E}">
+        <p14:creationId xmlns:p14="http://schemas.microsoft.com/office/powerpoint/2010/main" val="47472117"/>
+      </p:ext>
+    </p:extLst>
   </p:cSld>
   <p:clrMapOvr>
     <a:masterClrMapping/>

--- a/MH_semestralka_p__index/presentation/MH_semestralka_p__index_prezentace.pptx
+++ b/MH_semestralka_p__index/presentation/MH_semestralka_p__index_prezentace.pptx
@@ -4247,7 +4247,52 @@
               </a:defRPr>
             </a:pPr>
             <a:r>
-              <a:t>Dotaz: najít všechny body do zadané vzdálenosti od středu.</a:t>
+              <a:rPr dirty="0" err="1"/>
+              <a:t>Dotaz</a:t>
+            </a:r>
+            <a:r>
+              <a:rPr dirty="0"/>
+              <a:t>: </a:t>
+            </a:r>
+            <a:r>
+              <a:rPr dirty="0" err="1"/>
+              <a:t>najít</a:t>
+            </a:r>
+            <a:r>
+              <a:rPr dirty="0"/>
+              <a:t> </a:t>
+            </a:r>
+            <a:r>
+              <a:rPr dirty="0" err="1"/>
+              <a:t>všechny</a:t>
+            </a:r>
+            <a:r>
+              <a:rPr dirty="0"/>
+              <a:t> body do </a:t>
+            </a:r>
+            <a:r>
+              <a:rPr dirty="0" err="1"/>
+              <a:t>zadané</a:t>
+            </a:r>
+            <a:r>
+              <a:rPr dirty="0"/>
+              <a:t> </a:t>
+            </a:r>
+            <a:r>
+              <a:rPr dirty="0" err="1"/>
+              <a:t>vzdálenosti</a:t>
+            </a:r>
+            <a:r>
+              <a:rPr dirty="0"/>
+              <a:t> od </a:t>
+            </a:r>
+            <a:r>
+              <a:rPr dirty="0" err="1"/>
+              <a:t>středu</a:t>
+            </a:r>
+            <a:r>
+              <a:rPr dirty="0"/>
+              <a:t>.</a:t>
             </a:r>
           </a:p>
           <a:p>
@@ -4265,7 +4310,60 @@
               </a:defRPr>
             </a:pPr>
             <a:r>
-              <a:t>Nejdřív se použije bbox kružnice jako hrubý filtr.</a:t>
+              <a:rPr dirty="0" err="1"/>
+              <a:t>Nejdřív</a:t>
+            </a:r>
+            <a:r>
+              <a:rPr dirty="0"/>
+              <a:t> se </a:t>
+            </a:r>
+            <a:r>
+              <a:rPr dirty="0" err="1"/>
+              <a:t>použije</a:t>
+            </a:r>
+            <a:r>
+              <a:rPr dirty="0"/>
+              <a:t> </a:t>
+            </a:r>
+            <a:r>
+              <a:rPr dirty="0" err="1"/>
+              <a:t>bbox</a:t>
+            </a:r>
+            <a:r>
+              <a:rPr dirty="0"/>
+              <a:t> </a:t>
+            </a:r>
+            <a:r>
+              <a:rPr dirty="0" err="1"/>
+              <a:t>kružnice</a:t>
+            </a:r>
+            <a:r>
+              <a:rPr dirty="0"/>
+              <a:t> </a:t>
+            </a:r>
+            <a:r>
+              <a:rPr dirty="0" err="1"/>
+              <a:t>jako</a:t>
+            </a:r>
+            <a:r>
+              <a:rPr dirty="0"/>
+              <a:t> </a:t>
+            </a:r>
+            <a:r>
+              <a:rPr dirty="0" err="1"/>
+              <a:t>hrubý</a:t>
+            </a:r>
+            <a:r>
+              <a:rPr dirty="0"/>
+              <a:t> </a:t>
+            </a:r>
+            <a:r>
+              <a:rPr dirty="0" err="1"/>
+              <a:t>filtr</a:t>
+            </a:r>
+            <a:r>
+              <a:rPr dirty="0"/>
+              <a:t>.</a:t>
             </a:r>
           </a:p>
           <a:p>
@@ -4283,7 +4381,52 @@
               </a:defRPr>
             </a:pPr>
             <a:r>
-              <a:t>Potom musí následovat přesný test eukleidovské vzdálenosti.</a:t>
+              <a:rPr dirty="0" err="1"/>
+              <a:t>Potom</a:t>
+            </a:r>
+            <a:r>
+              <a:rPr dirty="0"/>
+              <a:t> </a:t>
+            </a:r>
+            <a:r>
+              <a:rPr dirty="0" err="1"/>
+              <a:t>musí</a:t>
+            </a:r>
+            <a:r>
+              <a:rPr dirty="0"/>
+              <a:t> </a:t>
+            </a:r>
+            <a:r>
+              <a:rPr dirty="0" err="1"/>
+              <a:t>následovat</a:t>
+            </a:r>
+            <a:r>
+              <a:rPr dirty="0"/>
+              <a:t> </a:t>
+            </a:r>
+            <a:r>
+              <a:rPr dirty="0" err="1"/>
+              <a:t>přesný</a:t>
+            </a:r>
+            <a:r>
+              <a:rPr dirty="0"/>
+              <a:t> test </a:t>
+            </a:r>
+            <a:r>
+              <a:rPr dirty="0" err="1"/>
+              <a:t>eukleidovské</a:t>
+            </a:r>
+            <a:r>
+              <a:rPr dirty="0"/>
+              <a:t> </a:t>
+            </a:r>
+            <a:r>
+              <a:rPr dirty="0" err="1"/>
+              <a:t>vzdálenosti</a:t>
+            </a:r>
+            <a:r>
+              <a:rPr dirty="0"/>
+              <a:t>.</a:t>
             </a:r>
           </a:p>
           <a:p>
@@ -4301,7 +4444,20 @@
               </a:defRPr>
             </a:pPr>
             <a:r>
-              <a:t>Poloměry v benchmarku: 5 km, 10 km a 25 km.</a:t>
+              <a:rPr dirty="0" err="1"/>
+              <a:t>Poloměry</a:t>
+            </a:r>
+            <a:r>
+              <a:rPr dirty="0"/>
+              <a:t> v </a:t>
+            </a:r>
+            <a:r>
+              <a:rPr dirty="0" err="1"/>
+              <a:t>benchmarku</a:t>
+            </a:r>
+            <a:r>
+              <a:rPr dirty="0"/>
+              <a:t>: 5 km, 10 km a 25 km.</a:t>
             </a:r>
           </a:p>
         </p:txBody>
@@ -4604,7 +4760,64 @@
               </a:defRPr>
             </a:pPr>
             <a:r>
-              <a:t>U polygon query je přesné ověření kandidátů dražší než u bbox dotazu.</a:t>
+              <a:rPr dirty="0"/>
+              <a:t>U polygon query je </a:t>
+            </a:r>
+            <a:r>
+              <a:rPr dirty="0" err="1"/>
+              <a:t>přesné</a:t>
+            </a:r>
+            <a:r>
+              <a:rPr dirty="0"/>
+              <a:t> </a:t>
+            </a:r>
+            <a:r>
+              <a:rPr dirty="0" err="1"/>
+              <a:t>ověření</a:t>
+            </a:r>
+            <a:r>
+              <a:rPr dirty="0"/>
+              <a:t> </a:t>
+            </a:r>
+            <a:r>
+              <a:rPr dirty="0" err="1"/>
+              <a:t>kandidátů</a:t>
+            </a:r>
+            <a:r>
+              <a:rPr dirty="0"/>
+              <a:t> </a:t>
+            </a:r>
+            <a:r>
+              <a:rPr dirty="0" err="1"/>
+              <a:t>dražší</a:t>
+            </a:r>
+            <a:r>
+              <a:rPr dirty="0"/>
+              <a:t> </a:t>
+            </a:r>
+            <a:r>
+              <a:rPr dirty="0" err="1"/>
+              <a:t>než</a:t>
+            </a:r>
+            <a:r>
+              <a:rPr dirty="0"/>
+              <a:t> u </a:t>
+            </a:r>
+            <a:r>
+              <a:rPr dirty="0" err="1"/>
+              <a:t>bbox</a:t>
+            </a:r>
+            <a:r>
+              <a:rPr dirty="0"/>
+              <a:t> </a:t>
+            </a:r>
+            <a:r>
+              <a:rPr dirty="0" err="1"/>
+              <a:t>dotazu</a:t>
+            </a:r>
+            <a:r>
+              <a:rPr dirty="0"/>
+              <a:t>.</a:t>
             </a:r>
           </a:p>
           <a:p>
@@ -4622,7 +4835,48 @@
               </a:defRPr>
             </a:pPr>
             <a:r>
-              <a:t>Pro 50 000 bodů je nejrychlejší R-tree/STRtree, dlaždicový index je druhý.</a:t>
+              <a:rPr dirty="0"/>
+              <a:t>Pro 50 000 </a:t>
+            </a:r>
+            <a:r>
+              <a:rPr dirty="0" err="1"/>
+              <a:t>bodů</a:t>
+            </a:r>
+            <a:r>
+              <a:rPr dirty="0"/>
+              <a:t> je </a:t>
+            </a:r>
+            <a:r>
+              <a:rPr dirty="0" err="1"/>
+              <a:t>nejrychlejší</a:t>
+            </a:r>
+            <a:r>
+              <a:rPr dirty="0"/>
+              <a:t> R-tree/</a:t>
+            </a:r>
+            <a:r>
+              <a:rPr dirty="0" err="1"/>
+              <a:t>STRtree</a:t>
+            </a:r>
+            <a:r>
+              <a:rPr dirty="0"/>
+              <a:t>, </a:t>
+            </a:r>
+            <a:r>
+              <a:rPr dirty="0" err="1"/>
+              <a:t>dlaždicový</a:t>
+            </a:r>
+            <a:r>
+              <a:rPr dirty="0"/>
+              <a:t> index je </a:t>
+            </a:r>
+            <a:r>
+              <a:rPr dirty="0" err="1"/>
+              <a:t>druhý</a:t>
+            </a:r>
+            <a:r>
+              <a:rPr dirty="0"/>
+              <a:t>.</a:t>
             </a:r>
           </a:p>
           <a:p>
@@ -4640,7 +4894,72 @@
               </a:defRPr>
             </a:pPr>
             <a:r>
-              <a:t>U menších datasetů režie indexu může převážit nad přínosem.</a:t>
+              <a:rPr dirty="0"/>
+              <a:t>U </a:t>
+            </a:r>
+            <a:r>
+              <a:rPr dirty="0" err="1"/>
+              <a:t>menších</a:t>
+            </a:r>
+            <a:r>
+              <a:rPr dirty="0"/>
+              <a:t> </a:t>
+            </a:r>
+            <a:r>
+              <a:rPr dirty="0" err="1"/>
+              <a:t>datasetů</a:t>
+            </a:r>
+            <a:r>
+              <a:rPr dirty="0"/>
+              <a:t> </a:t>
+            </a:r>
+            <a:r>
+              <a:rPr dirty="0" err="1"/>
+              <a:t>režie</a:t>
+            </a:r>
+            <a:r>
+              <a:rPr dirty="0"/>
+              <a:t> </a:t>
+            </a:r>
+            <a:r>
+              <a:rPr dirty="0" err="1"/>
+              <a:t>indexu</a:t>
+            </a:r>
+            <a:r>
+              <a:rPr dirty="0"/>
+              <a:t> </a:t>
+            </a:r>
+            <a:r>
+              <a:rPr dirty="0" err="1"/>
+              <a:t>může</a:t>
+            </a:r>
+            <a:r>
+              <a:rPr dirty="0"/>
+              <a:t> </a:t>
+            </a:r>
+            <a:r>
+              <a:rPr dirty="0" err="1"/>
+              <a:t>převážit</a:t>
+            </a:r>
+            <a:r>
+              <a:rPr dirty="0"/>
+              <a:t> </a:t>
+            </a:r>
+            <a:r>
+              <a:rPr dirty="0" err="1"/>
+              <a:t>nad</a:t>
+            </a:r>
+            <a:r>
+              <a:rPr dirty="0"/>
+              <a:t> </a:t>
+            </a:r>
+            <a:r>
+              <a:rPr dirty="0" err="1"/>
+              <a:t>přínosem</a:t>
+            </a:r>
+            <a:r>
+              <a:rPr dirty="0"/>
+              <a:t>.</a:t>
             </a:r>
           </a:p>
         </p:txBody>
@@ -4661,8 +4980,8 @@
         </p:blipFill>
         <p:spPr>
           <a:xfrm>
-            <a:off x="6172200" y="1417320"/>
-            <a:ext cx="5394960" cy="2995554"/>
+            <a:off x="6065442" y="639984"/>
+            <a:ext cx="5665249" cy="3145632"/>
           </a:xfrm>
           <a:prstGeom prst="rect">
             <a:avLst/>
@@ -4685,7 +5004,7 @@
         </p:blipFill>
         <p:spPr>
           <a:xfrm>
-            <a:off x="198426" y="4383847"/>
+            <a:off x="270517" y="4242115"/>
             <a:ext cx="11460174" cy="2295845"/>
           </a:xfrm>
           <a:prstGeom prst="rect">
@@ -4878,7 +5197,72 @@
               </a:defRPr>
             </a:pPr>
             <a:r>
-              <a:t>Radius query: bbox kružnice je poměrně těsný filtr, přesný test je jednoduchá vzdálenost.</a:t>
+              <a:rPr dirty="0"/>
+              <a:t>Radius query: </a:t>
+            </a:r>
+            <a:r>
+              <a:rPr dirty="0" err="1"/>
+              <a:t>bbox</a:t>
+            </a:r>
+            <a:r>
+              <a:rPr dirty="0"/>
+              <a:t> </a:t>
+            </a:r>
+            <a:r>
+              <a:rPr dirty="0" err="1"/>
+              <a:t>kružnice</a:t>
+            </a:r>
+            <a:r>
+              <a:rPr dirty="0"/>
+              <a:t> je </a:t>
+            </a:r>
+            <a:r>
+              <a:rPr dirty="0" err="1"/>
+              <a:t>poměrně</a:t>
+            </a:r>
+            <a:r>
+              <a:rPr dirty="0"/>
+              <a:t> </a:t>
+            </a:r>
+            <a:r>
+              <a:rPr dirty="0" err="1"/>
+              <a:t>těsný</a:t>
+            </a:r>
+            <a:r>
+              <a:rPr dirty="0"/>
+              <a:t> </a:t>
+            </a:r>
+            <a:r>
+              <a:rPr dirty="0" err="1"/>
+              <a:t>filtr</a:t>
+            </a:r>
+            <a:r>
+              <a:rPr dirty="0"/>
+              <a:t>, </a:t>
+            </a:r>
+            <a:r>
+              <a:rPr dirty="0" err="1"/>
+              <a:t>přesný</a:t>
+            </a:r>
+            <a:r>
+              <a:rPr dirty="0"/>
+              <a:t> test je </a:t>
+            </a:r>
+            <a:r>
+              <a:rPr dirty="0" err="1"/>
+              <a:t>jednoduchá</a:t>
+            </a:r>
+            <a:r>
+              <a:rPr dirty="0"/>
+              <a:t> </a:t>
+            </a:r>
+            <a:r>
+              <a:rPr dirty="0" err="1"/>
+              <a:t>vzdálenost</a:t>
+            </a:r>
+            <a:r>
+              <a:rPr dirty="0"/>
+              <a:t>.</a:t>
             </a:r>
           </a:p>
           <a:p>
@@ -4896,7 +5280,80 @@
               </a:defRPr>
             </a:pPr>
             <a:r>
-              <a:t>Polygon query: bbox kraje může obsahovat mnoho bodů mimo skutečný tvar.</a:t>
+              <a:rPr dirty="0"/>
+              <a:t>Polygon query: </a:t>
+            </a:r>
+            <a:r>
+              <a:rPr dirty="0" err="1"/>
+              <a:t>bbox</a:t>
+            </a:r>
+            <a:r>
+              <a:rPr dirty="0"/>
+              <a:t> </a:t>
+            </a:r>
+            <a:r>
+              <a:rPr dirty="0" err="1"/>
+              <a:t>kraje</a:t>
+            </a:r>
+            <a:r>
+              <a:rPr dirty="0"/>
+              <a:t> </a:t>
+            </a:r>
+            <a:r>
+              <a:rPr dirty="0" err="1"/>
+              <a:t>může</a:t>
+            </a:r>
+            <a:r>
+              <a:rPr dirty="0"/>
+              <a:t> </a:t>
+            </a:r>
+            <a:r>
+              <a:rPr dirty="0" err="1"/>
+              <a:t>obsahovat</a:t>
+            </a:r>
+            <a:r>
+              <a:rPr dirty="0"/>
+              <a:t> </a:t>
+            </a:r>
+            <a:r>
+              <a:rPr dirty="0" err="1"/>
+              <a:t>mnoho</a:t>
+            </a:r>
+            <a:r>
+              <a:rPr dirty="0"/>
+              <a:t> </a:t>
+            </a:r>
+            <a:r>
+              <a:rPr dirty="0" err="1"/>
+              <a:t>bodů</a:t>
+            </a:r>
+            <a:r>
+              <a:rPr dirty="0"/>
+              <a:t> </a:t>
+            </a:r>
+            <a:r>
+              <a:rPr dirty="0" err="1"/>
+              <a:t>mimo</a:t>
+            </a:r>
+            <a:r>
+              <a:rPr dirty="0"/>
+              <a:t> </a:t>
+            </a:r>
+            <a:r>
+              <a:rPr dirty="0" err="1"/>
+              <a:t>skutečný</a:t>
+            </a:r>
+            <a:r>
+              <a:rPr dirty="0"/>
+              <a:t> </a:t>
+            </a:r>
+            <a:r>
+              <a:rPr dirty="0" err="1"/>
+              <a:t>tvar</a:t>
+            </a:r>
+            <a:r>
+              <a:rPr dirty="0"/>
+              <a:t>.</a:t>
             </a:r>
           </a:p>
           <a:p>
@@ -4914,7 +5371,72 @@
               </a:defRPr>
             </a:pPr>
             <a:r>
-              <a:t>Proto je u polygonů důležité, kolik falešných kandidátů projde hrubým filtrem.</a:t>
+              <a:rPr dirty="0"/>
+              <a:t>Proto je u </a:t>
+            </a:r>
+            <a:r>
+              <a:rPr dirty="0" err="1"/>
+              <a:t>polygonů</a:t>
+            </a:r>
+            <a:r>
+              <a:rPr dirty="0"/>
+              <a:t> </a:t>
+            </a:r>
+            <a:r>
+              <a:rPr dirty="0" err="1"/>
+              <a:t>důležité</a:t>
+            </a:r>
+            <a:r>
+              <a:rPr dirty="0"/>
+              <a:t>, </a:t>
+            </a:r>
+            <a:r>
+              <a:rPr dirty="0" err="1"/>
+              <a:t>kolik</a:t>
+            </a:r>
+            <a:r>
+              <a:rPr dirty="0"/>
+              <a:t> </a:t>
+            </a:r>
+            <a:r>
+              <a:rPr dirty="0" err="1"/>
+              <a:t>falešných</a:t>
+            </a:r>
+            <a:r>
+              <a:rPr dirty="0"/>
+              <a:t> </a:t>
+            </a:r>
+            <a:r>
+              <a:rPr dirty="0" err="1"/>
+              <a:t>kandidátů</a:t>
+            </a:r>
+            <a:r>
+              <a:rPr dirty="0"/>
+              <a:t> </a:t>
+            </a:r>
+            <a:r>
+              <a:rPr dirty="0" err="1"/>
+              <a:t>projde</a:t>
+            </a:r>
+            <a:r>
+              <a:rPr dirty="0"/>
+              <a:t> </a:t>
+            </a:r>
+            <a:r>
+              <a:rPr dirty="0" err="1"/>
+              <a:t>hrubým</a:t>
+            </a:r>
+            <a:r>
+              <a:rPr dirty="0"/>
+              <a:t> </a:t>
+            </a:r>
+            <a:r>
+              <a:rPr dirty="0" err="1"/>
+              <a:t>filtrem</a:t>
+            </a:r>
+            <a:r>
+              <a:rPr dirty="0"/>
+              <a:t>.</a:t>
             </a:r>
           </a:p>
           <a:p>
@@ -4932,7 +5454,52 @@
               </a:defRPr>
             </a:pPr>
             <a:r>
-              <a:t>Různé typy dotazů mohou zvýhodnit jiný index.</a:t>
+              <a:rPr dirty="0" err="1"/>
+              <a:t>Různé</a:t>
+            </a:r>
+            <a:r>
+              <a:rPr dirty="0"/>
+              <a:t> </a:t>
+            </a:r>
+            <a:r>
+              <a:rPr dirty="0" err="1"/>
+              <a:t>typy</a:t>
+            </a:r>
+            <a:r>
+              <a:rPr dirty="0"/>
+              <a:t> </a:t>
+            </a:r>
+            <a:r>
+              <a:rPr dirty="0" err="1"/>
+              <a:t>dotazů</a:t>
+            </a:r>
+            <a:r>
+              <a:rPr dirty="0"/>
+              <a:t> </a:t>
+            </a:r>
+            <a:r>
+              <a:rPr dirty="0" err="1"/>
+              <a:t>mohou</a:t>
+            </a:r>
+            <a:r>
+              <a:rPr dirty="0"/>
+              <a:t> </a:t>
+            </a:r>
+            <a:r>
+              <a:rPr dirty="0" err="1"/>
+              <a:t>zvýhodnit</a:t>
+            </a:r>
+            <a:r>
+              <a:rPr dirty="0"/>
+              <a:t> </a:t>
+            </a:r>
+            <a:r>
+              <a:rPr dirty="0" err="1"/>
+              <a:t>jiný</a:t>
+            </a:r>
+            <a:r>
+              <a:rPr dirty="0"/>
+              <a:t> index.</a:t>
             </a:r>
           </a:p>
         </p:txBody>
@@ -5180,7 +5747,72 @@
               </a:defRPr>
             </a:pPr>
             <a:r>
-              <a:t>Pro bodové bbox a radius dotazy vyšel v projektu nejlépe jednoduchý dlaždicový index.</a:t>
+              <a:rPr dirty="0"/>
+              <a:t>Pro </a:t>
+            </a:r>
+            <a:r>
+              <a:rPr dirty="0" err="1"/>
+              <a:t>bodové</a:t>
+            </a:r>
+            <a:r>
+              <a:rPr dirty="0"/>
+              <a:t> </a:t>
+            </a:r>
+            <a:r>
+              <a:rPr dirty="0" err="1"/>
+              <a:t>bbox</a:t>
+            </a:r>
+            <a:r>
+              <a:rPr dirty="0"/>
+              <a:t> a radius </a:t>
+            </a:r>
+            <a:r>
+              <a:rPr dirty="0" err="1"/>
+              <a:t>dotazy</a:t>
+            </a:r>
+            <a:r>
+              <a:rPr dirty="0"/>
+              <a:t> </a:t>
+            </a:r>
+            <a:r>
+              <a:rPr dirty="0" err="1"/>
+              <a:t>vyšel</a:t>
+            </a:r>
+            <a:r>
+              <a:rPr dirty="0"/>
+              <a:t> v </a:t>
+            </a:r>
+            <a:r>
+              <a:rPr dirty="0" err="1"/>
+              <a:t>projektu</a:t>
+            </a:r>
+            <a:r>
+              <a:rPr dirty="0"/>
+              <a:t> </a:t>
+            </a:r>
+            <a:r>
+              <a:rPr dirty="0" err="1"/>
+              <a:t>nejlépe</a:t>
+            </a:r>
+            <a:r>
+              <a:rPr dirty="0"/>
+              <a:t> </a:t>
+            </a:r>
+            <a:r>
+              <a:rPr dirty="0" err="1"/>
+              <a:t>jednoduchý</a:t>
+            </a:r>
+            <a:r>
+              <a:rPr dirty="0"/>
+              <a:t> </a:t>
+            </a:r>
+            <a:r>
+              <a:rPr dirty="0" err="1"/>
+              <a:t>dlaždicový</a:t>
+            </a:r>
+            <a:r>
+              <a:rPr dirty="0"/>
+              <a:t> index.</a:t>
             </a:r>
           </a:p>
           <a:p>
@@ -5198,7 +5830,68 @@
               </a:defRPr>
             </a:pPr>
             <a:r>
-              <a:t>Lineární průchod je dobrý jako referenční metoda, ale špatně škáluje.</a:t>
+              <a:rPr dirty="0" err="1"/>
+              <a:t>Lineární</a:t>
+            </a:r>
+            <a:r>
+              <a:rPr dirty="0"/>
+              <a:t> </a:t>
+            </a:r>
+            <a:r>
+              <a:rPr dirty="0" err="1"/>
+              <a:t>průchod</a:t>
+            </a:r>
+            <a:r>
+              <a:rPr dirty="0"/>
+              <a:t> je </a:t>
+            </a:r>
+            <a:r>
+              <a:rPr dirty="0" err="1"/>
+              <a:t>dobrý</a:t>
+            </a:r>
+            <a:r>
+              <a:rPr dirty="0"/>
+              <a:t> </a:t>
+            </a:r>
+            <a:r>
+              <a:rPr dirty="0" err="1"/>
+              <a:t>jako</a:t>
+            </a:r>
+            <a:r>
+              <a:rPr dirty="0"/>
+              <a:t> </a:t>
+            </a:r>
+            <a:r>
+              <a:rPr dirty="0" err="1"/>
+              <a:t>referenční</a:t>
+            </a:r>
+            <a:r>
+              <a:rPr dirty="0"/>
+              <a:t> </a:t>
+            </a:r>
+            <a:r>
+              <a:rPr dirty="0" err="1"/>
+              <a:t>metoda</a:t>
+            </a:r>
+            <a:r>
+              <a:rPr dirty="0"/>
+              <a:t>, ale </a:t>
+            </a:r>
+            <a:r>
+              <a:rPr dirty="0" err="1"/>
+              <a:t>špatně</a:t>
+            </a:r>
+            <a:r>
+              <a:rPr dirty="0"/>
+              <a:t> </a:t>
+            </a:r>
+            <a:r>
+              <a:rPr dirty="0" err="1"/>
+              <a:t>škáluje</a:t>
+            </a:r>
+            <a:r>
+              <a:rPr dirty="0"/>
+              <a:t>.</a:t>
             </a:r>
           </a:p>
           <a:p>
@@ -5216,7 +5909,48 @@
               </a:defRPr>
             </a:pPr>
             <a:r>
-              <a:t>R-tree/STRtree je obecnější a u polygon query nad 50 000 body byl nejrychlejší.</a:t>
+              <a:rPr dirty="0"/>
+              <a:t>R-tree/</a:t>
+            </a:r>
+            <a:r>
+              <a:rPr dirty="0" err="1"/>
+              <a:t>STRtree</a:t>
+            </a:r>
+            <a:r>
+              <a:rPr dirty="0"/>
+              <a:t> je </a:t>
+            </a:r>
+            <a:r>
+              <a:rPr dirty="0" err="1"/>
+              <a:t>obecnější</a:t>
+            </a:r>
+            <a:r>
+              <a:rPr dirty="0"/>
+              <a:t> a u polygon query </a:t>
+            </a:r>
+            <a:r>
+              <a:rPr dirty="0" err="1"/>
+              <a:t>nad</a:t>
+            </a:r>
+            <a:r>
+              <a:rPr dirty="0"/>
+              <a:t> 50 000 body </a:t>
+            </a:r>
+            <a:r>
+              <a:rPr dirty="0" err="1"/>
+              <a:t>byl</a:t>
+            </a:r>
+            <a:r>
+              <a:rPr dirty="0"/>
+              <a:t> </a:t>
+            </a:r>
+            <a:r>
+              <a:rPr dirty="0" err="1"/>
+              <a:t>nejrychlejší</a:t>
+            </a:r>
+            <a:r>
+              <a:rPr dirty="0"/>
+              <a:t>.</a:t>
             </a:r>
           </a:p>
           <a:p>
@@ -5234,7 +5968,56 @@
               </a:defRPr>
             </a:pPr>
             <a:r>
-              <a:t>EPSG:5514 zjednodušuje interpretaci a umožňuje korektní metrické výpočty.</a:t>
+              <a:rPr dirty="0"/>
+              <a:t>EPSG:5514 </a:t>
+            </a:r>
+            <a:r>
+              <a:rPr dirty="0" err="1"/>
+              <a:t>zjednodušuje</a:t>
+            </a:r>
+            <a:r>
+              <a:rPr dirty="0"/>
+              <a:t> </a:t>
+            </a:r>
+            <a:r>
+              <a:rPr dirty="0" err="1"/>
+              <a:t>interpretaci</a:t>
+            </a:r>
+            <a:r>
+              <a:rPr dirty="0"/>
+              <a:t> a </a:t>
+            </a:r>
+            <a:r>
+              <a:rPr dirty="0" err="1"/>
+              <a:t>umožňuje</a:t>
+            </a:r>
+            <a:r>
+              <a:rPr dirty="0"/>
+              <a:t> </a:t>
+            </a:r>
+            <a:r>
+              <a:rPr dirty="0" err="1"/>
+              <a:t>korektní</a:t>
+            </a:r>
+            <a:r>
+              <a:rPr dirty="0"/>
+              <a:t> </a:t>
+            </a:r>
+            <a:r>
+              <a:rPr dirty="0" err="1"/>
+              <a:t>metrické</a:t>
+            </a:r>
+            <a:r>
+              <a:rPr dirty="0"/>
+              <a:t> </a:t>
+            </a:r>
+            <a:r>
+              <a:rPr dirty="0" err="1"/>
+              <a:t>výpočty</a:t>
+            </a:r>
+            <a:r>
+              <a:rPr dirty="0"/>
+              <a:t>.</a:t>
             </a:r>
           </a:p>
           <a:p>
@@ -5252,7 +6035,76 @@
               </a:defRPr>
             </a:pPr>
             <a:r>
-              <a:t>Nejdůležitější praktický závěr: index je hrubý filtr, přesný geometrický test je stále nutný.</a:t>
+              <a:rPr dirty="0" err="1"/>
+              <a:t>Nejdůležitější</a:t>
+            </a:r>
+            <a:r>
+              <a:rPr dirty="0"/>
+              <a:t> </a:t>
+            </a:r>
+            <a:r>
+              <a:rPr dirty="0" err="1"/>
+              <a:t>praktický</a:t>
+            </a:r>
+            <a:r>
+              <a:rPr dirty="0"/>
+              <a:t> </a:t>
+            </a:r>
+            <a:r>
+              <a:rPr dirty="0" err="1"/>
+              <a:t>závěr</a:t>
+            </a:r>
+            <a:r>
+              <a:rPr dirty="0"/>
+              <a:t>: index je </a:t>
+            </a:r>
+            <a:r>
+              <a:rPr dirty="0" err="1"/>
+              <a:t>hrubý</a:t>
+            </a:r>
+            <a:r>
+              <a:rPr dirty="0"/>
+              <a:t> </a:t>
+            </a:r>
+            <a:r>
+              <a:rPr dirty="0" err="1"/>
+              <a:t>filtr</a:t>
+            </a:r>
+            <a:r>
+              <a:rPr dirty="0"/>
+              <a:t>, </a:t>
+            </a:r>
+            <a:r>
+              <a:rPr dirty="0" err="1"/>
+              <a:t>přesný</a:t>
+            </a:r>
+            <a:r>
+              <a:rPr dirty="0"/>
+              <a:t> </a:t>
+            </a:r>
+            <a:r>
+              <a:rPr dirty="0" err="1"/>
+              <a:t>geometrický</a:t>
+            </a:r>
+            <a:r>
+              <a:rPr dirty="0"/>
+              <a:t> test je </a:t>
+            </a:r>
+            <a:r>
+              <a:rPr dirty="0" err="1"/>
+              <a:t>stále</a:t>
+            </a:r>
+            <a:r>
+              <a:rPr dirty="0"/>
+              <a:t> </a:t>
+            </a:r>
+            <a:r>
+              <a:rPr dirty="0" err="1"/>
+              <a:t>nutný</a:t>
+            </a:r>
+            <a:r>
+              <a:rPr dirty="0"/>
+              <a:t>.</a:t>
             </a:r>
           </a:p>
         </p:txBody>
@@ -5740,7 +6592,48 @@
               </a:defRPr>
             </a:pPr>
             <a:r>
-              <a:t>Polygon Olomouckého kraje a polygon celé České republiky.</a:t>
+              <a:rPr dirty="0"/>
+              <a:t>Polygon </a:t>
+            </a:r>
+            <a:r>
+              <a:rPr dirty="0" err="1"/>
+              <a:t>Olomouckého</a:t>
+            </a:r>
+            <a:r>
+              <a:rPr dirty="0"/>
+              <a:t> </a:t>
+            </a:r>
+            <a:r>
+              <a:rPr dirty="0" err="1"/>
+              <a:t>kraje</a:t>
+            </a:r>
+            <a:r>
+              <a:rPr dirty="0"/>
+              <a:t> a polygon </a:t>
+            </a:r>
+            <a:r>
+              <a:rPr dirty="0" err="1"/>
+              <a:t>celé</a:t>
+            </a:r>
+            <a:r>
+              <a:rPr dirty="0"/>
+              <a:t> </a:t>
+            </a:r>
+            <a:r>
+              <a:rPr dirty="0" err="1"/>
+              <a:t>České</a:t>
+            </a:r>
+            <a:r>
+              <a:rPr dirty="0"/>
+              <a:t> </a:t>
+            </a:r>
+            <a:r>
+              <a:rPr dirty="0" err="1"/>
+              <a:t>republiky</a:t>
+            </a:r>
+            <a:r>
+              <a:rPr dirty="0"/>
+              <a:t>.</a:t>
             </a:r>
           </a:p>
           <a:p>
@@ -5758,7 +6651,20 @@
               </a:defRPr>
             </a:pPr>
             <a:r>
-              <a:t>Vrstva 14 krajů ČR pro polygon query.</a:t>
+              <a:rPr dirty="0" err="1"/>
+              <a:t>Vrstva</a:t>
+            </a:r>
+            <a:r>
+              <a:rPr dirty="0"/>
+              <a:t> 14 </a:t>
+            </a:r>
+            <a:r>
+              <a:rPr dirty="0" err="1"/>
+              <a:t>krajů</a:t>
+            </a:r>
+            <a:r>
+              <a:rPr dirty="0"/>
+              <a:t> ČR pro polygon query.</a:t>
             </a:r>
           </a:p>
           <a:p>
@@ -5776,7 +6682,44 @@
               </a:defRPr>
             </a:pPr>
             <a:r>
-              <a:t>Náhodné body generované uvnitř skutečných polygonů.</a:t>
+              <a:rPr dirty="0" err="1"/>
+              <a:t>Náhodné</a:t>
+            </a:r>
+            <a:r>
+              <a:rPr dirty="0"/>
+              <a:t> body </a:t>
+            </a:r>
+            <a:r>
+              <a:rPr dirty="0" err="1"/>
+              <a:t>generované</a:t>
+            </a:r>
+            <a:r>
+              <a:rPr dirty="0"/>
+              <a:t> </a:t>
+            </a:r>
+            <a:r>
+              <a:rPr dirty="0" err="1"/>
+              <a:t>uvnitř</a:t>
+            </a:r>
+            <a:r>
+              <a:rPr dirty="0"/>
+              <a:t> </a:t>
+            </a:r>
+            <a:r>
+              <a:rPr dirty="0" err="1"/>
+              <a:t>skutečných</a:t>
+            </a:r>
+            <a:r>
+              <a:rPr dirty="0"/>
+              <a:t> </a:t>
+            </a:r>
+            <a:r>
+              <a:rPr dirty="0" err="1"/>
+              <a:t>polygonů</a:t>
+            </a:r>
+            <a:r>
+              <a:rPr dirty="0"/>
+              <a:t>.</a:t>
             </a:r>
           </a:p>
           <a:p>
@@ -5794,7 +6737,44 @@
               </a:defRPr>
             </a:pPr>
             <a:r>
-              <a:t>Datasety: Olomoucký kraj 500, 1 000, 5 000 bodů; ČR 5 000, 10 000, 50 000 bodů.</a:t>
+              <a:rPr dirty="0" err="1"/>
+              <a:t>Datasety</a:t>
+            </a:r>
+            <a:r>
+              <a:rPr dirty="0"/>
+              <a:t>: </a:t>
+            </a:r>
+            <a:r>
+              <a:rPr dirty="0" err="1"/>
+              <a:t>Olomoucký</a:t>
+            </a:r>
+            <a:r>
+              <a:rPr dirty="0"/>
+              <a:t> </a:t>
+            </a:r>
+            <a:r>
+              <a:rPr dirty="0" err="1"/>
+              <a:t>kraj</a:t>
+            </a:r>
+            <a:r>
+              <a:rPr dirty="0"/>
+              <a:t> 500, 1 000, 5 000 </a:t>
+            </a:r>
+            <a:r>
+              <a:rPr dirty="0" err="1"/>
+              <a:t>bodů</a:t>
+            </a:r>
+            <a:r>
+              <a:rPr dirty="0"/>
+              <a:t>; ČR 5 000, 10 000, 50 000 </a:t>
+            </a:r>
+            <a:r>
+              <a:rPr dirty="0" err="1"/>
+              <a:t>bodů</a:t>
+            </a:r>
+            <a:r>
+              <a:rPr dirty="0"/>
+              <a:t>.</a:t>
             </a:r>
           </a:p>
           <a:p>
@@ -5812,7 +6792,60 @@
               </a:defRPr>
             </a:pPr>
             <a:r>
-              <a:t>Zdroj hranic: veřejná ArcGIS REST služba České geologické služby.</a:t>
+              <a:rPr dirty="0" err="1"/>
+              <a:t>Zdroj</a:t>
+            </a:r>
+            <a:r>
+              <a:rPr dirty="0"/>
+              <a:t> </a:t>
+            </a:r>
+            <a:r>
+              <a:rPr dirty="0" err="1"/>
+              <a:t>hranic</a:t>
+            </a:r>
+            <a:r>
+              <a:rPr dirty="0"/>
+              <a:t>: </a:t>
+            </a:r>
+            <a:r>
+              <a:rPr dirty="0" err="1"/>
+              <a:t>veřejná</a:t>
+            </a:r>
+            <a:r>
+              <a:rPr dirty="0"/>
+              <a:t> ArcGIS REST </a:t>
+            </a:r>
+            <a:r>
+              <a:rPr dirty="0" err="1"/>
+              <a:t>služba</a:t>
+            </a:r>
+            <a:r>
+              <a:rPr dirty="0"/>
+              <a:t> </a:t>
+            </a:r>
+            <a:r>
+              <a:rPr dirty="0" err="1"/>
+              <a:t>České</a:t>
+            </a:r>
+            <a:r>
+              <a:rPr dirty="0"/>
+              <a:t> </a:t>
+            </a:r>
+            <a:r>
+              <a:rPr dirty="0" err="1"/>
+              <a:t>geologické</a:t>
+            </a:r>
+            <a:r>
+              <a:rPr dirty="0"/>
+              <a:t> </a:t>
+            </a:r>
+            <a:r>
+              <a:rPr dirty="0" err="1"/>
+              <a:t>služby</a:t>
+            </a:r>
+            <a:r>
+              <a:rPr dirty="0"/>
+              <a:t>.</a:t>
             </a:r>
           </a:p>
         </p:txBody>
